--- a/lessons/6-4/slides.pptx
+++ b/lessons/6-4/slides.pptx
@@ -10925,7 +10925,7 @@
       </p:sp>
       <p:sp>
         <p:nvSpPr>
-          <p:cNvPr id="20" name="Shape 18"/>
+          <p:cNvPr id="20" name="Text 18"/>
           <p:cNvSpPr/>
           <p:nvPr/>
         </p:nvSpPr>
@@ -10946,33 +10946,7 @@
             <a:solidFill>
               <a:srgbClr val="D6DBDF"/>
             </a:solidFill>
-            <a:prstDash val="solid"/>
           </a:ln>
-          <a:effectLst>
-            <a:outerShdw sx="100000" sy="100000" kx="0" ky="0" algn="bl" rotWithShape="0" blurRad="50800" dist="12700" dir="5400000">
-              <a:srgbClr val="1C2E42">
-                <a:alpha val="10000"/>
-              </a:srgbClr>
-            </a:outerShdw>
-          </a:effectLst>
-        </p:spPr>
-      </p:sp>
-      <p:sp>
-        <p:nvSpPr>
-          <p:cNvPr id="21" name="Text 19"/>
-          <p:cNvSpPr/>
-          <p:nvPr/>
-        </p:nvSpPr>
-        <p:spPr>
-          <a:xfrm>
-            <a:off x="685800" y="1481328"/>
-            <a:ext cx="1447800" cy="384048"/>
-          </a:xfrm>
-          <a:prstGeom prst="rect">
-            <a:avLst/>
-          </a:prstGeom>
-          <a:noFill/>
-          <a:ln/>
         </p:spPr>
         <p:txBody>
           <a:bodyPr wrap="square" rtlCol="0" anchor="ctr"/>
@@ -10982,7 +10956,7 @@
               <a:buNone/>
             </a:pPr>
             <a:r>
-              <a:rPr lang="en-US" sz="900" dirty="0">
+              <a:rPr lang="en-US" sz="900" b="1" dirty="0">
                 <a:solidFill>
                   <a:srgbClr val="17324D"/>
                 </a:solidFill>
@@ -10998,7 +10972,7 @@
       </p:sp>
       <p:sp>
         <p:nvSpPr>
-          <p:cNvPr id="22" name="Shape 20"/>
+          <p:cNvPr id="21" name="Text 19"/>
           <p:cNvSpPr/>
           <p:nvPr/>
         </p:nvSpPr>
@@ -11019,33 +10993,7 @@
             <a:solidFill>
               <a:srgbClr val="D6DBDF"/>
             </a:solidFill>
-            <a:prstDash val="solid"/>
           </a:ln>
-          <a:effectLst>
-            <a:outerShdw sx="100000" sy="100000" kx="0" ky="0" algn="bl" rotWithShape="0" blurRad="50800" dist="12700" dir="5400000">
-              <a:srgbClr val="1C2E42">
-                <a:alpha val="10000"/>
-              </a:srgbClr>
-            </a:outerShdw>
-          </a:effectLst>
-        </p:spPr>
-      </p:sp>
-      <p:sp>
-        <p:nvSpPr>
-          <p:cNvPr id="23" name="Text 21"/>
-          <p:cNvSpPr/>
-          <p:nvPr/>
-        </p:nvSpPr>
-        <p:spPr>
-          <a:xfrm>
-            <a:off x="2453640" y="1481328"/>
-            <a:ext cx="1447800" cy="384048"/>
-          </a:xfrm>
-          <a:prstGeom prst="rect">
-            <a:avLst/>
-          </a:prstGeom>
-          <a:noFill/>
-          <a:ln/>
         </p:spPr>
         <p:txBody>
           <a:bodyPr wrap="square" rtlCol="0" anchor="ctr"/>
@@ -11055,7 +11003,7 @@
               <a:buNone/>
             </a:pPr>
             <a:r>
-              <a:rPr lang="en-US" sz="900" dirty="0">
+              <a:rPr lang="en-US" sz="900" b="1" dirty="0">
                 <a:solidFill>
                   <a:srgbClr val="17324D"/>
                 </a:solidFill>
@@ -11071,7 +11019,7 @@
       </p:sp>
       <p:sp>
         <p:nvSpPr>
-          <p:cNvPr id="24" name="Shape 22"/>
+          <p:cNvPr id="22" name="Text 20"/>
           <p:cNvSpPr/>
           <p:nvPr/>
         </p:nvSpPr>
@@ -11092,33 +11040,7 @@
             <a:solidFill>
               <a:srgbClr val="D6DBDF"/>
             </a:solidFill>
-            <a:prstDash val="solid"/>
           </a:ln>
-          <a:effectLst>
-            <a:outerShdw sx="100000" sy="100000" kx="0" ky="0" algn="bl" rotWithShape="0" blurRad="50800" dist="12700" dir="5400000">
-              <a:srgbClr val="1C2E42">
-                <a:alpha val="10000"/>
-              </a:srgbClr>
-            </a:outerShdw>
-          </a:effectLst>
-        </p:spPr>
-      </p:sp>
-      <p:sp>
-        <p:nvSpPr>
-          <p:cNvPr id="25" name="Text 23"/>
-          <p:cNvSpPr/>
-          <p:nvPr/>
-        </p:nvSpPr>
-        <p:spPr>
-          <a:xfrm>
-            <a:off x="4221480" y="1481328"/>
-            <a:ext cx="1447800" cy="384048"/>
-          </a:xfrm>
-          <a:prstGeom prst="rect">
-            <a:avLst/>
-          </a:prstGeom>
-          <a:noFill/>
-          <a:ln/>
         </p:spPr>
         <p:txBody>
           <a:bodyPr wrap="square" rtlCol="0" anchor="ctr"/>
@@ -11128,7 +11050,7 @@
               <a:buNone/>
             </a:pPr>
             <a:r>
-              <a:rPr lang="en-US" sz="900" dirty="0">
+              <a:rPr lang="en-US" sz="900" b="1" dirty="0">
                 <a:solidFill>
                   <a:srgbClr val="17324D"/>
                 </a:solidFill>
@@ -11144,7 +11066,7 @@
       </p:sp>
       <p:sp>
         <p:nvSpPr>
-          <p:cNvPr id="26" name="Shape 24"/>
+          <p:cNvPr id="23" name="Text 21"/>
           <p:cNvSpPr/>
           <p:nvPr/>
         </p:nvSpPr>
@@ -11165,33 +11087,7 @@
             <a:solidFill>
               <a:srgbClr val="D6DBDF"/>
             </a:solidFill>
-            <a:prstDash val="solid"/>
           </a:ln>
-          <a:effectLst>
-            <a:outerShdw sx="100000" sy="100000" kx="0" ky="0" algn="bl" rotWithShape="0" blurRad="50800" dist="12700" dir="5400000">
-              <a:srgbClr val="1C2E42">
-                <a:alpha val="10000"/>
-              </a:srgbClr>
-            </a:outerShdw>
-          </a:effectLst>
-        </p:spPr>
-      </p:sp>
-      <p:sp>
-        <p:nvSpPr>
-          <p:cNvPr id="27" name="Text 25"/>
-          <p:cNvSpPr/>
-          <p:nvPr/>
-        </p:nvSpPr>
-        <p:spPr>
-          <a:xfrm>
-            <a:off x="685800" y="1975104"/>
-            <a:ext cx="1447800" cy="384048"/>
-          </a:xfrm>
-          <a:prstGeom prst="rect">
-            <a:avLst/>
-          </a:prstGeom>
-          <a:noFill/>
-          <a:ln/>
         </p:spPr>
         <p:txBody>
           <a:bodyPr wrap="square" rtlCol="0" anchor="ctr"/>
@@ -11201,7 +11097,7 @@
               <a:buNone/>
             </a:pPr>
             <a:r>
-              <a:rPr lang="en-US" sz="900" dirty="0">
+              <a:rPr lang="en-US" sz="900" b="1" dirty="0">
                 <a:solidFill>
                   <a:srgbClr val="17324D"/>
                 </a:solidFill>
@@ -11217,7 +11113,7 @@
       </p:sp>
       <p:sp>
         <p:nvSpPr>
-          <p:cNvPr id="28" name="Shape 26"/>
+          <p:cNvPr id="24" name="Text 22"/>
           <p:cNvSpPr/>
           <p:nvPr/>
         </p:nvSpPr>
@@ -11238,33 +11134,7 @@
             <a:solidFill>
               <a:srgbClr val="D6DBDF"/>
             </a:solidFill>
-            <a:prstDash val="solid"/>
           </a:ln>
-          <a:effectLst>
-            <a:outerShdw sx="100000" sy="100000" kx="0" ky="0" algn="bl" rotWithShape="0" blurRad="50800" dist="12700" dir="5400000">
-              <a:srgbClr val="1C2E42">
-                <a:alpha val="10000"/>
-              </a:srgbClr>
-            </a:outerShdw>
-          </a:effectLst>
-        </p:spPr>
-      </p:sp>
-      <p:sp>
-        <p:nvSpPr>
-          <p:cNvPr id="29" name="Text 27"/>
-          <p:cNvSpPr/>
-          <p:nvPr/>
-        </p:nvSpPr>
-        <p:spPr>
-          <a:xfrm>
-            <a:off x="2453640" y="1975104"/>
-            <a:ext cx="1447800" cy="384048"/>
-          </a:xfrm>
-          <a:prstGeom prst="rect">
-            <a:avLst/>
-          </a:prstGeom>
-          <a:noFill/>
-          <a:ln/>
         </p:spPr>
         <p:txBody>
           <a:bodyPr wrap="square" rtlCol="0" anchor="ctr"/>
@@ -11274,7 +11144,7 @@
               <a:buNone/>
             </a:pPr>
             <a:r>
-              <a:rPr lang="en-US" sz="900" dirty="0">
+              <a:rPr lang="en-US" sz="900" b="1" dirty="0">
                 <a:solidFill>
                   <a:srgbClr val="17324D"/>
                 </a:solidFill>
@@ -11290,7 +11160,7 @@
       </p:sp>
       <p:sp>
         <p:nvSpPr>
-          <p:cNvPr id="30" name="Shape 28"/>
+          <p:cNvPr id="25" name="Text 23"/>
           <p:cNvSpPr/>
           <p:nvPr/>
         </p:nvSpPr>
@@ -11311,33 +11181,7 @@
             <a:solidFill>
               <a:srgbClr val="D6DBDF"/>
             </a:solidFill>
-            <a:prstDash val="solid"/>
           </a:ln>
-          <a:effectLst>
-            <a:outerShdw sx="100000" sy="100000" kx="0" ky="0" algn="bl" rotWithShape="0" blurRad="50800" dist="12700" dir="5400000">
-              <a:srgbClr val="1C2E42">
-                <a:alpha val="10000"/>
-              </a:srgbClr>
-            </a:outerShdw>
-          </a:effectLst>
-        </p:spPr>
-      </p:sp>
-      <p:sp>
-        <p:nvSpPr>
-          <p:cNvPr id="31" name="Text 29"/>
-          <p:cNvSpPr/>
-          <p:nvPr/>
-        </p:nvSpPr>
-        <p:spPr>
-          <a:xfrm>
-            <a:off x="4221480" y="1975104"/>
-            <a:ext cx="1447800" cy="384048"/>
-          </a:xfrm>
-          <a:prstGeom prst="rect">
-            <a:avLst/>
-          </a:prstGeom>
-          <a:noFill/>
-          <a:ln/>
         </p:spPr>
         <p:txBody>
           <a:bodyPr wrap="square" rtlCol="0" anchor="ctr"/>
@@ -11347,7 +11191,7 @@
               <a:buNone/>
             </a:pPr>
             <a:r>
-              <a:rPr lang="en-US" sz="900" dirty="0">
+              <a:rPr lang="en-US" sz="900" b="1" dirty="0">
                 <a:solidFill>
                   <a:srgbClr val="17324D"/>
                 </a:solidFill>
@@ -11363,7 +11207,7 @@
       </p:sp>
       <p:sp>
         <p:nvSpPr>
-          <p:cNvPr id="32" name="Shape 30"/>
+          <p:cNvPr id="26" name="Shape 24"/>
           <p:cNvSpPr/>
           <p:nvPr/>
         </p:nvSpPr>
@@ -11397,7 +11241,7 @@
       </p:sp>
       <p:sp>
         <p:nvSpPr>
-          <p:cNvPr id="33" name="Text 31"/>
+          <p:cNvPr id="27" name="Text 25"/>
           <p:cNvSpPr/>
           <p:nvPr/>
         </p:nvSpPr>
@@ -11438,7 +11282,7 @@
       </p:sp>
       <p:sp>
         <p:nvSpPr>
-          <p:cNvPr id="34" name="Shape 32"/>
+          <p:cNvPr id="28" name="Shape 26"/>
           <p:cNvSpPr/>
           <p:nvPr/>
         </p:nvSpPr>
@@ -11472,7 +11316,7 @@
       </p:sp>
       <p:sp>
         <p:nvSpPr>
-          <p:cNvPr id="35" name="Text 33"/>
+          <p:cNvPr id="29" name="Text 27"/>
           <p:cNvSpPr/>
           <p:nvPr/>
         </p:nvSpPr>
@@ -11513,7 +11357,7 @@
       </p:sp>
       <p:sp>
         <p:nvSpPr>
-          <p:cNvPr id="36" name="Shape 34"/>
+          <p:cNvPr id="30" name="Shape 28"/>
           <p:cNvSpPr/>
           <p:nvPr/>
         </p:nvSpPr>
@@ -11547,7 +11391,7 @@
       </p:sp>
       <p:sp>
         <p:nvSpPr>
-          <p:cNvPr id="37" name="Text 35"/>
+          <p:cNvPr id="31" name="Text 29"/>
           <p:cNvSpPr/>
           <p:nvPr/>
         </p:nvSpPr>
@@ -11588,7 +11432,7 @@
       </p:sp>
       <p:sp>
         <p:nvSpPr>
-          <p:cNvPr id="38" name="Shape 36"/>
+          <p:cNvPr id="32" name="Shape 30"/>
           <p:cNvSpPr/>
           <p:nvPr/>
         </p:nvSpPr>
@@ -11622,7 +11466,7 @@
       </p:sp>
       <p:sp>
         <p:nvSpPr>
-          <p:cNvPr id="39" name="Text 37"/>
+          <p:cNvPr id="33" name="Text 31"/>
           <p:cNvSpPr/>
           <p:nvPr/>
         </p:nvSpPr>
@@ -11663,7 +11507,7 @@
       </p:sp>
       <p:sp>
         <p:nvSpPr>
-          <p:cNvPr id="40" name="Text 38"/>
+          <p:cNvPr id="34" name="Text 32"/>
           <p:cNvSpPr/>
           <p:nvPr/>
         </p:nvSpPr>
@@ -11702,7 +11546,7 @@
       </p:sp>
       <p:sp>
         <p:nvSpPr>
-          <p:cNvPr id="41" name="Shape 39"/>
+          <p:cNvPr id="35" name="Shape 33"/>
           <p:cNvSpPr/>
           <p:nvPr/>
         </p:nvSpPr>
@@ -11725,7 +11569,7 @@
       </p:sp>
       <p:sp>
         <p:nvSpPr>
-          <p:cNvPr id="42" name="Shape 40"/>
+          <p:cNvPr id="36" name="Shape 34"/>
           <p:cNvSpPr/>
           <p:nvPr/>
         </p:nvSpPr>
@@ -11748,7 +11592,7 @@
       </p:sp>
       <p:sp>
         <p:nvSpPr>
-          <p:cNvPr id="43" name="Shape 41"/>
+          <p:cNvPr id="37" name="Shape 35"/>
           <p:cNvSpPr/>
           <p:nvPr/>
         </p:nvSpPr>
@@ -11771,7 +11615,7 @@
       </p:sp>
       <p:sp>
         <p:nvSpPr>
-          <p:cNvPr id="44" name="Shape 42"/>
+          <p:cNvPr id="38" name="Shape 36"/>
           <p:cNvSpPr/>
           <p:nvPr/>
         </p:nvSpPr>
@@ -11794,7 +11638,7 @@
       </p:sp>
       <p:sp>
         <p:nvSpPr>
-          <p:cNvPr id="45" name="Shape 43"/>
+          <p:cNvPr id="39" name="Shape 37"/>
           <p:cNvSpPr/>
           <p:nvPr/>
         </p:nvSpPr>

--- a/lessons/6-4/slides.pptx
+++ b/lessons/6-4/slides.pptx
@@ -2495,7 +2495,7 @@
                 <a:ea typeface="Outfit" pitchFamily="34" charset="-122"/>
                 <a:cs typeface="Outfit" pitchFamily="34" charset="-120"/>
               </a:rPr>
-              <a:t>6.EE.3</a:t>
+              <a:t>6.AT.7</a:t>
             </a:r>
             <a:endParaRPr lang="en-US" sz="1000" dirty="0"/>
           </a:p>
@@ -3218,7 +3218,7 @@
                 <a:ea typeface="Outfit" pitchFamily="34" charset="-122"/>
                 <a:cs typeface="Outfit" pitchFamily="34" charset="-120"/>
               </a:rPr>
-              <a:t>6.EE.3</a:t>
+              <a:t>6.AT.7</a:t>
             </a:r>
             <a:endParaRPr lang="en-US" sz="900" dirty="0"/>
           </a:p>
@@ -4497,7 +4497,7 @@
                 <a:ea typeface="Outfit" pitchFamily="34" charset="-122"/>
                 <a:cs typeface="Outfit" pitchFamily="34" charset="-120"/>
               </a:rPr>
-              <a:t>6.EE.3</a:t>
+              <a:t>6.AT.7</a:t>
             </a:r>
             <a:endParaRPr lang="en-US" sz="900" dirty="0"/>
           </a:p>
@@ -5766,7 +5766,7 @@
                 <a:ea typeface="Outfit" pitchFamily="34" charset="-122"/>
                 <a:cs typeface="Outfit" pitchFamily="34" charset="-120"/>
               </a:rPr>
-              <a:t>6.EE.3</a:t>
+              <a:t>6.AT.7</a:t>
             </a:r>
             <a:endParaRPr lang="en-US" sz="900" dirty="0"/>
           </a:p>
@@ -6962,7 +6962,7 @@
                 <a:ea typeface="Outfit" pitchFamily="34" charset="-122"/>
                 <a:cs typeface="Outfit" pitchFamily="34" charset="-120"/>
               </a:rPr>
-              <a:t>6.EE.3</a:t>
+              <a:t>6.AT.7</a:t>
             </a:r>
             <a:endParaRPr lang="en-US" sz="900" dirty="0"/>
           </a:p>
@@ -8024,7 +8024,7 @@
                 <a:ea typeface="Outfit" pitchFamily="34" charset="-122"/>
                 <a:cs typeface="Outfit" pitchFamily="34" charset="-120"/>
               </a:rPr>
-              <a:t>6.EE.3</a:t>
+              <a:t>6.AT.7</a:t>
             </a:r>
             <a:endParaRPr lang="en-US" sz="900" dirty="0"/>
           </a:p>
@@ -8989,7 +8989,7 @@
                 <a:ea typeface="Outfit" pitchFamily="34" charset="-122"/>
                 <a:cs typeface="Outfit" pitchFamily="34" charset="-120"/>
               </a:rPr>
-              <a:t>6.EE.3</a:t>
+              <a:t>6.AT.7</a:t>
             </a:r>
             <a:endParaRPr lang="en-US" sz="900" dirty="0"/>
           </a:p>
@@ -9906,7 +9906,7 @@
                 <a:ea typeface="Outfit" pitchFamily="34" charset="-122"/>
                 <a:cs typeface="Outfit" pitchFamily="34" charset="-120"/>
               </a:rPr>
-              <a:t>6.EE.3</a:t>
+              <a:t>6.AT.7</a:t>
             </a:r>
             <a:endParaRPr lang="en-US" sz="900" dirty="0"/>
           </a:p>
@@ -11034,7 +11034,7 @@
                 <a:ea typeface="Outfit" pitchFamily="34" charset="-122"/>
                 <a:cs typeface="Outfit" pitchFamily="34" charset="-120"/>
               </a:rPr>
-              <a:t>6.EE.3</a:t>
+              <a:t>6.AT.7</a:t>
             </a:r>
             <a:endParaRPr lang="en-US" sz="900" dirty="0"/>
           </a:p>
@@ -12467,7 +12467,7 @@
                 <a:ea typeface="Outfit" pitchFamily="34" charset="-122"/>
                 <a:cs typeface="Outfit" pitchFamily="34" charset="-120"/>
               </a:rPr>
-              <a:t>6.EE.3</a:t>
+              <a:t>6.AT.7</a:t>
             </a:r>
             <a:endParaRPr lang="en-US" sz="900" dirty="0"/>
           </a:p>
@@ -13281,7 +13281,7 @@
                 <a:ea typeface="Outfit" pitchFamily="34" charset="-122"/>
                 <a:cs typeface="Outfit" pitchFamily="34" charset="-120"/>
               </a:rPr>
-              <a:t>6.EE.3</a:t>
+              <a:t>6.AT.7</a:t>
             </a:r>
             <a:endParaRPr lang="en-US" sz="900" dirty="0"/>
           </a:p>
@@ -14341,7 +14341,7 @@
                 <a:ea typeface="Outfit" pitchFamily="34" charset="-122"/>
                 <a:cs typeface="Outfit" pitchFamily="34" charset="-120"/>
               </a:rPr>
-              <a:t>6.EE.3</a:t>
+              <a:t>6.AT.7</a:t>
             </a:r>
             <a:endParaRPr lang="en-US" sz="900" dirty="0"/>
           </a:p>
@@ -15401,7 +15401,7 @@
                 <a:ea typeface="Outfit" pitchFamily="34" charset="-122"/>
                 <a:cs typeface="Outfit" pitchFamily="34" charset="-120"/>
               </a:rPr>
-              <a:t>6.EE.3</a:t>
+              <a:t>6.AT.7</a:t>
             </a:r>
             <a:endParaRPr lang="en-US" sz="900" dirty="0"/>
           </a:p>
@@ -16461,7 +16461,7 @@
                 <a:ea typeface="Outfit" pitchFamily="34" charset="-122"/>
                 <a:cs typeface="Outfit" pitchFamily="34" charset="-120"/>
               </a:rPr>
-              <a:t>6.EE.3</a:t>
+              <a:t>6.AT.7</a:t>
             </a:r>
             <a:endParaRPr lang="en-US" sz="900" dirty="0"/>
           </a:p>
@@ -17521,7 +17521,7 @@
                 <a:ea typeface="Outfit" pitchFamily="34" charset="-122"/>
                 <a:cs typeface="Outfit" pitchFamily="34" charset="-120"/>
               </a:rPr>
-              <a:t>6.EE.3</a:t>
+              <a:t>6.AT.7</a:t>
             </a:r>
             <a:endParaRPr lang="en-US" sz="900" dirty="0"/>
           </a:p>
@@ -18509,7 +18509,7 @@
                 <a:ea typeface="Outfit" pitchFamily="34" charset="-122"/>
                 <a:cs typeface="Outfit" pitchFamily="34" charset="-120"/>
               </a:rPr>
-              <a:t>6.EE.3</a:t>
+              <a:t>6.AT.7</a:t>
             </a:r>
             <a:endParaRPr lang="en-US" sz="900" dirty="0"/>
           </a:p>
@@ -20040,7 +20040,7 @@
                           <a:ea typeface="Hanken Grotesk" pitchFamily="34" charset="-122"/>
                           <a:cs typeface="Hanken Grotesk" pitchFamily="34" charset="-120"/>
                         </a:rPr>
-                        <a:t>Coefficient</a:t>
+                        <a:t>Distributive Property</a:t>
                       </a:r>
                       <a:pPr indent="0" marL="0">
                         <a:buNone/>
@@ -20064,7 +20064,7 @@
                           <a:ea typeface="Hanken Grotesk" pitchFamily="34" charset="-122"/>
                           <a:cs typeface="Hanken Grotesk" pitchFamily="34" charset="-120"/>
                         </a:rPr>
-                        <a:t>Coeficiente</a:t>
+                        <a:t>Propiedad distributiva</a:t>
                       </a:r>
                       <a:endParaRPr lang="en-US" sz="950" dirty="0">
                         <a:latin typeface="Hanken Grotesk" charset="0"/>
@@ -20132,7 +20132,7 @@
                           <a:ea typeface="Hanken Grotesk" pitchFamily="34" charset="-122"/>
                           <a:cs typeface="Hanken Grotesk" pitchFamily="34" charset="-120"/>
                         </a:rPr>
-                        <a:t>The number in front of a letter, like the 3 in 3x.</a:t>
+                        <a:t>You can multiply a number by each part inside the parentheses, then add.</a:t>
                       </a:r>
                       <a:pPr indent="0" marL="0">
                         <a:buNone/>
@@ -20156,7 +20156,7 @@
                           <a:ea typeface="Hanken Grotesk" pitchFamily="34" charset="-122"/>
                           <a:cs typeface="Hanken Grotesk" pitchFamily="34" charset="-120"/>
                         </a:rPr>
-                        <a:t>El número frente a una letra, como el 3 en 3x.</a:t>
+                        <a:t>Puedes multiplicar un número por cada parte dentro del paréntesis y luego sumar.</a:t>
                       </a:r>
                       <a:endParaRPr lang="en-US" sz="900" dirty="0">
                         <a:latin typeface="Hanken Grotesk" charset="0"/>
@@ -20224,7 +20224,7 @@
                           <a:ea typeface="Hanken Grotesk" pitchFamily="34" charset="-122"/>
                           <a:cs typeface="Hanken Grotesk" pitchFamily="34" charset="-120"/>
                         </a:rPr>
-                        <a:t>In 3x, the 3 is the coefficient — it tells you to multiply x by 3</a:t>
+                        <a:t>5(7 + 2) = 5 × 7 + 5 × 2 = 35 + 10 = 45; and 5 × 9 = 45 — same answer either way</a:t>
                       </a:r>
                       <a:endParaRPr lang="en-US" sz="900" dirty="0">
                         <a:latin typeface="Hanken Grotesk" charset="0"/>
@@ -20688,7 +20688,7 @@
                 <a:ea typeface="Outfit" pitchFamily="34" charset="-122"/>
                 <a:cs typeface="Outfit" pitchFamily="34" charset="-120"/>
               </a:rPr>
-              <a:t>6.EE.3</a:t>
+              <a:t>6.AT.7</a:t>
             </a:r>
             <a:endParaRPr lang="en-US" sz="900" dirty="0"/>
           </a:p>

--- a/lessons/6-4/slides.pptx
+++ b/lessons/6-4/slides.pptx
@@ -694,7 +694,7 @@
           <a:p>
             <a:r>
               <a:rPr lang="en-US" dirty="0"/>
-              <a:t>Answer key — 15 − 8 = 7, but 8 − 15 = −7. These are NOT equal. The commutative property does NOT apply to subtraction. It only works for addition and multiplication.</a:t>
+              <a:t>Answer key — 4(2²) + 3 = 4(4) + 3 = 16 + 3 = 19. Square the 2 first, THEN multiply by 4.</a:t>
             </a:r>
             <a:endParaRPr lang="en-US" dirty="0"/>
           </a:p>
@@ -2452,7 +2452,7 @@
                 <a:ea typeface="Outfit" pitchFamily="34" charset="-122"/>
                 <a:cs typeface="Outfit" pitchFamily="34" charset="-120"/>
               </a:rPr>
-              <a:t>Properties of Operations</a:t>
+              <a:t>Evaluate Expressions</a:t>
             </a:r>
             <a:endParaRPr lang="en-US" sz="3000" dirty="0"/>
           </a:p>
@@ -2495,7 +2495,7 @@
                 <a:ea typeface="Outfit" pitchFamily="34" charset="-122"/>
                 <a:cs typeface="Outfit" pitchFamily="34" charset="-120"/>
               </a:rPr>
-              <a:t>6.AT.7</a:t>
+              <a:t>6.AT.6c</a:t>
             </a:r>
             <a:endParaRPr lang="en-US" sz="1000" dirty="0"/>
           </a:p>
@@ -2534,7 +2534,7 @@
                 <a:ea typeface="Hanken Grotesk" pitchFamily="34" charset="-122"/>
                 <a:cs typeface="Hanken Grotesk" pitchFamily="34" charset="-120"/>
               </a:rPr>
-              <a:t>Unit 6  ·  Lesson 6-4</a:t>
+              <a:t>Unit 6  ·  Lesson 6-2</a:t>
             </a:r>
             <a:endParaRPr lang="en-US" sz="1000" dirty="0"/>
           </a:p>
@@ -2919,7 +2919,7 @@
                 <a:ea typeface="Hanken Grotesk" pitchFamily="34" charset="-122"/>
                 <a:cs typeface="Hanken Grotesk" pitchFamily="34" charset="-120"/>
               </a:rPr>
-              <a:t>I can use the commutative, associative, and identity properties to rewrite expressions.</a:t>
+              <a:t>I can evaluate algebraic expressions by substituting values for the variables.</a:t>
             </a:r>
             <a:endParaRPr lang="en-US" sz="1100" dirty="0"/>
           </a:p>
@@ -3045,7 +3045,7 @@
                 <a:ea typeface="Hanken Grotesk" pitchFamily="34" charset="-122"/>
                 <a:cs typeface="Hanken Grotesk" pitchFamily="34" charset="-120"/>
               </a:rPr>
-              <a:t>I can explain my reasoning using the words commutative property, associative property, and identity property.</a:t>
+              <a:t>I can explain my steps using the words variable, expression, evaluate, and substitute.</a:t>
             </a:r>
             <a:endParaRPr lang="en-US" sz="1050" dirty="0"/>
           </a:p>
@@ -3218,7 +3218,7 @@
                 <a:ea typeface="Outfit" pitchFamily="34" charset="-122"/>
                 <a:cs typeface="Outfit" pitchFamily="34" charset="-120"/>
               </a:rPr>
-              <a:t>6.AT.7</a:t>
+              <a:t>6.AT.6c</a:t>
             </a:r>
             <a:endParaRPr lang="en-US" sz="900" dirty="0"/>
           </a:p>
@@ -3437,7 +3437,7 @@
                 <a:ea typeface="Hanken Grotesk" pitchFamily="34" charset="-122"/>
                 <a:cs typeface="Hanken Grotesk" pitchFamily="34" charset="-120"/>
               </a:rPr>
-              <a:t>Reveal Math Grade 6  ·  Unit 6  ·  Lesson 6-4</a:t>
+              <a:t>Reveal Math Grade 6  ·  Unit 6  ·  Lesson 6-2</a:t>
             </a:r>
             <a:endParaRPr lang="en-US" sz="750" dirty="0"/>
           </a:p>
@@ -3549,7 +3549,7 @@
                 <a:ea typeface="Outfit" pitchFamily="34" charset="-122"/>
                 <a:cs typeface="Outfit" pitchFamily="34" charset="-120"/>
               </a:rPr>
-              <a:t>Read each pair of expressions. Identify which property of operations is being shown.</a:t>
+              <a:t>Evaluate the expression 150 + 12s for each number of speakers.</a:t>
             </a:r>
             <a:endParaRPr lang="en-US" sz="1050" dirty="0"/>
           </a:p>
@@ -3635,7 +3635,7 @@
                 <a:ea typeface="Hanken Grotesk" pitchFamily="34" charset="-122"/>
                 <a:cs typeface="Hanken Grotesk" pitchFamily="34" charset="-120"/>
               </a:rPr>
-              <a:t>6 + 9 = 9 + 6</a:t>
+              <a:t>Card 1</a:t>
             </a:r>
             <a:endParaRPr lang="en-US" sz="900" dirty="0"/>
           </a:p>
@@ -3682,7 +3682,7 @@
                 <a:ea typeface="Hanken Grotesk" pitchFamily="34" charset="-122"/>
                 <a:cs typeface="Hanken Grotesk" pitchFamily="34" charset="-120"/>
               </a:rPr>
-              <a:t>4 × 7 = 7 × 4</a:t>
+              <a:t>Card 2</a:t>
             </a:r>
             <a:endParaRPr lang="en-US" sz="900" dirty="0"/>
           </a:p>
@@ -3729,7 +3729,7 @@
                 <a:ea typeface="Hanken Grotesk" pitchFamily="34" charset="-122"/>
                 <a:cs typeface="Hanken Grotesk" pitchFamily="34" charset="-120"/>
               </a:rPr>
-              <a:t>(3 + 5) + 2 = 3 + (5 + 2)</a:t>
+              <a:t>Card 3</a:t>
             </a:r>
             <a:endParaRPr lang="en-US" sz="900" dirty="0"/>
           </a:p>
@@ -3776,7 +3776,7 @@
                 <a:ea typeface="Hanken Grotesk" pitchFamily="34" charset="-122"/>
                 <a:cs typeface="Hanken Grotesk" pitchFamily="34" charset="-120"/>
               </a:rPr>
-              <a:t>(4 × 2) × 5 = 4 × (2 × 5)</a:t>
+              <a:t>Card 4</a:t>
             </a:r>
             <a:endParaRPr lang="en-US" sz="900" dirty="0"/>
           </a:p>
@@ -3784,112 +3784,18 @@
       </p:sp>
       <p:sp>
         <p:nvSpPr>
-          <p:cNvPr id="24" name="Text 22"/>
-          <p:cNvSpPr/>
-          <p:nvPr/>
-        </p:nvSpPr>
-        <p:spPr>
-          <a:xfrm>
-            <a:off x="2362200" y="1975104"/>
-            <a:ext cx="1630680" cy="384048"/>
+          <p:cNvPr id="24" name="Shape 22"/>
+          <p:cNvSpPr/>
+          <p:nvPr/>
+        </p:nvSpPr>
+        <p:spPr>
+          <a:xfrm>
+            <a:off x="594360" y="2560320"/>
+            <a:ext cx="2514600" cy="1965960"/>
           </a:xfrm>
           <a:prstGeom prst="roundRect">
             <a:avLst>
-              <a:gd name="adj" fmla="val 11905"/>
-            </a:avLst>
-          </a:prstGeom>
-          <a:solidFill>
-            <a:srgbClr val="FBEFD0"/>
-          </a:solidFill>
-          <a:ln w="12700">
-            <a:solidFill>
-              <a:srgbClr val="D6DBDF"/>
-            </a:solidFill>
-          </a:ln>
-        </p:spPr>
-        <p:txBody>
-          <a:bodyPr wrap="square" rtlCol="0" anchor="ctr"/>
-          <a:lstStyle/>
-          <a:p>
-            <a:pPr algn="ctr" indent="0" marL="0">
-              <a:buNone/>
-            </a:pPr>
-            <a:r>
-              <a:rPr lang="en-US" sz="900" b="1" dirty="0">
-                <a:solidFill>
-                  <a:srgbClr val="17324D"/>
-                </a:solidFill>
-                <a:latin typeface="Hanken Grotesk" pitchFamily="34" charset="0"/>
-                <a:ea typeface="Hanken Grotesk" pitchFamily="34" charset="-122"/>
-                <a:cs typeface="Hanken Grotesk" pitchFamily="34" charset="-120"/>
-              </a:rPr>
-              <a:t>14 + 0 = 14</a:t>
-            </a:r>
-            <a:endParaRPr lang="en-US" sz="900" dirty="0"/>
-          </a:p>
-        </p:txBody>
-      </p:sp>
-      <p:sp>
-        <p:nvSpPr>
-          <p:cNvPr id="25" name="Text 23"/>
-          <p:cNvSpPr/>
-          <p:nvPr/>
-        </p:nvSpPr>
-        <p:spPr>
-          <a:xfrm>
-            <a:off x="4130040" y="1975104"/>
-            <a:ext cx="1630680" cy="384048"/>
-          </a:xfrm>
-          <a:prstGeom prst="roundRect">
-            <a:avLst>
-              <a:gd name="adj" fmla="val 11905"/>
-            </a:avLst>
-          </a:prstGeom>
-          <a:solidFill>
-            <a:srgbClr val="FBEFD0"/>
-          </a:solidFill>
-          <a:ln w="12700">
-            <a:solidFill>
-              <a:srgbClr val="D6DBDF"/>
-            </a:solidFill>
-          </a:ln>
-        </p:spPr>
-        <p:txBody>
-          <a:bodyPr wrap="square" rtlCol="0" anchor="ctr"/>
-          <a:lstStyle/>
-          <a:p>
-            <a:pPr algn="ctr" indent="0" marL="0">
-              <a:buNone/>
-            </a:pPr>
-            <a:r>
-              <a:rPr lang="en-US" sz="900" b="1" dirty="0">
-                <a:solidFill>
-                  <a:srgbClr val="17324D"/>
-                </a:solidFill>
-                <a:latin typeface="Hanken Grotesk" pitchFamily="34" charset="0"/>
-                <a:ea typeface="Hanken Grotesk" pitchFamily="34" charset="-122"/>
-                <a:cs typeface="Hanken Grotesk" pitchFamily="34" charset="-120"/>
-              </a:rPr>
-              <a:t>8 × 1 = 8</a:t>
-            </a:r>
-            <a:endParaRPr lang="en-US" sz="900" dirty="0"/>
-          </a:p>
-        </p:txBody>
-      </p:sp>
-      <p:sp>
-        <p:nvSpPr>
-          <p:cNvPr id="26" name="Shape 24"/>
-          <p:cNvSpPr/>
-          <p:nvPr/>
-        </p:nvSpPr>
-        <p:spPr>
-          <a:xfrm>
-            <a:off x="594360" y="2560320"/>
-            <a:ext cx="1630680" cy="1965960"/>
-          </a:xfrm>
-          <a:prstGeom prst="roundRect">
-            <a:avLst>
-              <a:gd name="adj" fmla="val 2804"/>
+              <a:gd name="adj" fmla="val 2326"/>
             </a:avLst>
           </a:prstGeom>
           <a:solidFill>
@@ -3912,14 +3818,14 @@
       </p:sp>
       <p:sp>
         <p:nvSpPr>
-          <p:cNvPr id="27" name="Text 25"/>
+          <p:cNvPr id="25" name="Text 23"/>
           <p:cNvSpPr/>
           <p:nvPr/>
         </p:nvSpPr>
         <p:spPr>
           <a:xfrm>
             <a:off x="594360" y="2560320"/>
-            <a:ext cx="1630680" cy="292608"/>
+            <a:ext cx="2514600" cy="292608"/>
           </a:xfrm>
           <a:prstGeom prst="rect">
             <a:avLst/>
@@ -3945,7 +3851,7 @@
                 <a:ea typeface="Outfit" pitchFamily="34" charset="-122"/>
                 <a:cs typeface="Outfit" pitchFamily="34" charset="-120"/>
               </a:rPr>
-              <a:t>Commutative Property</a:t>
+              <a:t>Group A</a:t>
             </a:r>
             <a:endParaRPr lang="en-US" sz="950" dirty="0"/>
           </a:p>
@@ -3953,18 +3859,18 @@
       </p:sp>
       <p:sp>
         <p:nvSpPr>
-          <p:cNvPr id="28" name="Shape 26"/>
-          <p:cNvSpPr/>
-          <p:nvPr/>
-        </p:nvSpPr>
-        <p:spPr>
-          <a:xfrm>
-            <a:off x="2362200" y="2560320"/>
-            <a:ext cx="1630680" cy="1965960"/>
+          <p:cNvPr id="26" name="Shape 24"/>
+          <p:cNvSpPr/>
+          <p:nvPr/>
+        </p:nvSpPr>
+        <p:spPr>
+          <a:xfrm>
+            <a:off x="3246120" y="2560320"/>
+            <a:ext cx="2514600" cy="1965960"/>
           </a:xfrm>
           <a:prstGeom prst="roundRect">
             <a:avLst>
-              <a:gd name="adj" fmla="val 2804"/>
+              <a:gd name="adj" fmla="val 2326"/>
             </a:avLst>
           </a:prstGeom>
           <a:solidFill>
@@ -3987,14 +3893,14 @@
       </p:sp>
       <p:sp>
         <p:nvSpPr>
-          <p:cNvPr id="29" name="Text 27"/>
-          <p:cNvSpPr/>
-          <p:nvPr/>
-        </p:nvSpPr>
-        <p:spPr>
-          <a:xfrm>
-            <a:off x="2362200" y="2560320"/>
-            <a:ext cx="1630680" cy="292608"/>
+          <p:cNvPr id="27" name="Text 25"/>
+          <p:cNvSpPr/>
+          <p:nvPr/>
+        </p:nvSpPr>
+        <p:spPr>
+          <a:xfrm>
+            <a:off x="3246120" y="2560320"/>
+            <a:ext cx="2514600" cy="292608"/>
           </a:xfrm>
           <a:prstGeom prst="rect">
             <a:avLst/>
@@ -4020,7 +3926,7 @@
                 <a:ea typeface="Outfit" pitchFamily="34" charset="-122"/>
                 <a:cs typeface="Outfit" pitchFamily="34" charset="-120"/>
               </a:rPr>
-              <a:t>Associative Property</a:t>
+              <a:t>Group B</a:t>
             </a:r>
             <a:endParaRPr lang="en-US" sz="950" dirty="0"/>
           </a:p>
@@ -4028,82 +3934,7 @@
       </p:sp>
       <p:sp>
         <p:nvSpPr>
-          <p:cNvPr id="30" name="Shape 28"/>
-          <p:cNvSpPr/>
-          <p:nvPr/>
-        </p:nvSpPr>
-        <p:spPr>
-          <a:xfrm>
-            <a:off x="4130040" y="2560320"/>
-            <a:ext cx="1630680" cy="1965960"/>
-          </a:xfrm>
-          <a:prstGeom prst="roundRect">
-            <a:avLst>
-              <a:gd name="adj" fmla="val 2804"/>
-            </a:avLst>
-          </a:prstGeom>
-          <a:solidFill>
-            <a:srgbClr val="FFFFFF"/>
-          </a:solidFill>
-          <a:ln w="12700">
-            <a:solidFill>
-              <a:srgbClr val="7A5C8E"/>
-            </a:solidFill>
-            <a:prstDash val="solid"/>
-          </a:ln>
-          <a:effectLst>
-            <a:outerShdw sx="100000" sy="100000" kx="0" ky="0" algn="bl" rotWithShape="0" blurRad="50800" dist="12700" dir="5400000">
-              <a:srgbClr val="1C2E42">
-                <a:alpha val="10000"/>
-              </a:srgbClr>
-            </a:outerShdw>
-          </a:effectLst>
-        </p:spPr>
-      </p:sp>
-      <p:sp>
-        <p:nvSpPr>
-          <p:cNvPr id="31" name="Text 29"/>
-          <p:cNvSpPr/>
-          <p:nvPr/>
-        </p:nvSpPr>
-        <p:spPr>
-          <a:xfrm>
-            <a:off x="4130040" y="2560320"/>
-            <a:ext cx="1630680" cy="292608"/>
-          </a:xfrm>
-          <a:prstGeom prst="rect">
-            <a:avLst/>
-          </a:prstGeom>
-          <a:solidFill>
-            <a:srgbClr val="7A5C8E"/>
-          </a:solidFill>
-          <a:ln/>
-        </p:spPr>
-        <p:txBody>
-          <a:bodyPr wrap="square" rtlCol="0" anchor="ctr"/>
-          <a:lstStyle/>
-          <a:p>
-            <a:pPr algn="ctr" indent="0" marL="0">
-              <a:buNone/>
-            </a:pPr>
-            <a:r>
-              <a:rPr lang="en-US" sz="950" b="1" dirty="0">
-                <a:solidFill>
-                  <a:srgbClr val="FFFFFF"/>
-                </a:solidFill>
-                <a:latin typeface="Outfit" pitchFamily="34" charset="0"/>
-                <a:ea typeface="Outfit" pitchFamily="34" charset="-122"/>
-                <a:cs typeface="Outfit" pitchFamily="34" charset="-120"/>
-              </a:rPr>
-              <a:t>Identity Property</a:t>
-            </a:r>
-            <a:endParaRPr lang="en-US" sz="950" dirty="0"/>
-          </a:p>
-        </p:txBody>
-      </p:sp>
-      <p:sp>
-        <p:nvSpPr>
-          <p:cNvPr id="32" name="Shape 30"/>
+          <p:cNvPr id="28" name="Shape 26"/>
           <p:cNvSpPr/>
           <p:nvPr/>
         </p:nvSpPr>
@@ -4137,7 +3968,7 @@
       </p:sp>
       <p:sp>
         <p:nvSpPr>
-          <p:cNvPr id="33" name="Text 31"/>
+          <p:cNvPr id="29" name="Text 27"/>
           <p:cNvSpPr/>
           <p:nvPr/>
         </p:nvSpPr>
@@ -4178,7 +4009,7 @@
       </p:sp>
       <p:sp>
         <p:nvSpPr>
-          <p:cNvPr id="34" name="Text 32"/>
+          <p:cNvPr id="30" name="Text 28"/>
           <p:cNvSpPr/>
           <p:nvPr/>
         </p:nvSpPr>
@@ -4209,7 +4040,7 @@
                 <a:ea typeface="Hanken Grotesk" pitchFamily="34" charset="-122"/>
                 <a:cs typeface="Hanken Grotesk" pitchFamily="34" charset="-120"/>
               </a:rPr>
-              <a:t>How can you tell the commutative property from the associative property? Use 6 + 9 = 9 + 6 and (3 + 5) + 2 = 3 + (5 + 2) to explain.</a:t>
+              <a:t>When you evaluate an expression like 4x² + 3, what order do you follow, and why must you square before you multiply?</a:t>
             </a:r>
             <a:endParaRPr lang="en-US" sz="1000" dirty="0"/>
           </a:p>
@@ -4217,7 +4048,7 @@
       </p:sp>
       <p:sp>
         <p:nvSpPr>
-          <p:cNvPr id="35" name="Shape 33"/>
+          <p:cNvPr id="31" name="Shape 29"/>
           <p:cNvSpPr/>
           <p:nvPr/>
         </p:nvSpPr>
@@ -4240,7 +4071,7 @@
       </p:sp>
       <p:sp>
         <p:nvSpPr>
-          <p:cNvPr id="36" name="Shape 34"/>
+          <p:cNvPr id="32" name="Shape 30"/>
           <p:cNvSpPr/>
           <p:nvPr/>
         </p:nvSpPr>
@@ -4263,7 +4094,7 @@
       </p:sp>
       <p:sp>
         <p:nvSpPr>
-          <p:cNvPr id="37" name="Shape 35"/>
+          <p:cNvPr id="33" name="Shape 31"/>
           <p:cNvSpPr/>
           <p:nvPr/>
         </p:nvSpPr>
@@ -4286,7 +4117,7 @@
       </p:sp>
       <p:sp>
         <p:nvSpPr>
-          <p:cNvPr id="38" name="Shape 36"/>
+          <p:cNvPr id="34" name="Shape 32"/>
           <p:cNvSpPr/>
           <p:nvPr/>
         </p:nvSpPr>
@@ -4309,7 +4140,7 @@
       </p:sp>
       <p:sp>
         <p:nvSpPr>
-          <p:cNvPr id="39" name="Shape 37"/>
+          <p:cNvPr id="35" name="Shape 33"/>
           <p:cNvSpPr/>
           <p:nvPr/>
         </p:nvSpPr>
@@ -4497,7 +4328,7 @@
                 <a:ea typeface="Outfit" pitchFamily="34" charset="-122"/>
                 <a:cs typeface="Outfit" pitchFamily="34" charset="-120"/>
               </a:rPr>
-              <a:t>6.AT.7</a:t>
+              <a:t>6.AT.6c</a:t>
             </a:r>
             <a:endParaRPr lang="en-US" sz="900" dirty="0"/>
           </a:p>
@@ -4716,7 +4547,7 @@
                 <a:ea typeface="Hanken Grotesk" pitchFamily="34" charset="-122"/>
                 <a:cs typeface="Hanken Grotesk" pitchFamily="34" charset="-120"/>
               </a:rPr>
-              <a:t>Reveal Math Grade 6  ·  Unit 6  ·  Lesson 6-4</a:t>
+              <a:t>Reveal Math Grade 6  ·  Unit 6  ·  Lesson 6-2</a:t>
             </a:r>
             <a:endParaRPr lang="en-US" sz="750" dirty="0"/>
           </a:p>
@@ -4871,7 +4702,7 @@
                 <a:ea typeface="Outfit" pitchFamily="34" charset="-122"/>
                 <a:cs typeface="Outfit" pitchFamily="34" charset="-120"/>
               </a:rPr>
-              <a:t>Find the Property Error</a:t>
+              <a:t>Find the Evaluation Error</a:t>
             </a:r>
             <a:endParaRPr lang="en-US" sz="1100" dirty="0"/>
           </a:p>
@@ -4925,11 +4756,11 @@
         <p:spPr>
           <a:xfrm>
             <a:off x="594360" y="1627632"/>
-            <a:ext cx="5166360" cy="1517904"/>
+            <a:ext cx="5166360" cy="1901952"/>
           </a:xfrm>
           <a:prstGeom prst="roundRect">
             <a:avLst>
-              <a:gd name="adj" fmla="val 3012"/>
+              <a:gd name="adj" fmla="val 2404"/>
             </a:avLst>
           </a:prstGeom>
           <a:solidFill>
@@ -5036,7 +4867,7 @@
                 <a:ea typeface="Hanken Grotesk" pitchFamily="34" charset="-122"/>
                 <a:cs typeface="Hanken Grotesk" pitchFamily="34" charset="-120"/>
               </a:rPr>
-              <a:t>Statement:  </a:t>
+              <a:t>Expression:  </a:t>
             </a:r>
             <a:pPr indent="0" marL="0">
               <a:buNone/>
@@ -5050,7 +4881,7 @@
                 <a:ea typeface="Courier New" pitchFamily="34" charset="-122"/>
                 <a:cs typeface="Courier New" pitchFamily="34" charset="-120"/>
               </a:rPr>
-              <a:t>15 − 8 = 8 − 15</a:t>
+              <a:t>4x² + 3 when x = 2</a:t>
             </a:r>
             <a:endParaRPr lang="en-US" sz="950" dirty="0"/>
           </a:p>
@@ -5103,7 +4934,7 @@
                 <a:ea typeface="Hanken Grotesk" pitchFamily="34" charset="-122"/>
                 <a:cs typeface="Hanken Grotesk" pitchFamily="34" charset="-120"/>
               </a:rPr>
-              <a:t>Student's claim:  </a:t>
+              <a:t>Substitute:  </a:t>
             </a:r>
             <a:pPr indent="0" marL="0">
               <a:buNone/>
@@ -5117,7 +4948,7 @@
                 <a:ea typeface="Courier New" pitchFamily="34" charset="-122"/>
                 <a:cs typeface="Courier New" pitchFamily="34" charset="-120"/>
               </a:rPr>
-              <a:t>This shows the Commutative Property of Subtraction.</a:t>
+              <a:t>4(2)² + 3</a:t>
             </a:r>
             <a:endParaRPr lang="en-US" sz="950" dirty="0"/>
           </a:p>
@@ -5170,7 +5001,7 @@
                 <a:ea typeface="Hanken Grotesk" pitchFamily="34" charset="-122"/>
                 <a:cs typeface="Hanken Grotesk" pitchFamily="34" charset="-120"/>
               </a:rPr>
-              <a:t>Reasoning:  </a:t>
+              <a:t>Apply exponent:  </a:t>
             </a:r>
             <a:pPr indent="0" marL="0">
               <a:buNone/>
@@ -5184,7 +5015,7 @@
                 <a:ea typeface="Courier New" pitchFamily="34" charset="-122"/>
                 <a:cs typeface="Courier New" pitchFamily="34" charset="-120"/>
               </a:rPr>
-              <a:t>I switched the order, so it must be commutative.</a:t>
+              <a:t>(4 × 2)² + 3 = 8² + 3</a:t>
             </a:r>
             <a:endParaRPr lang="en-US" sz="950" dirty="0"/>
           </a:p>
@@ -5198,8 +5029,8 @@
         </p:nvSpPr>
         <p:spPr>
           <a:xfrm>
-            <a:off x="594360" y="3282696"/>
-            <a:ext cx="5120640" cy="228600"/>
+            <a:off x="777240" y="3090672"/>
+            <a:ext cx="4892040" cy="347472"/>
           </a:xfrm>
           <a:prstGeom prst="rect">
             <a:avLst/>
@@ -5215,7 +5046,7 @@
               <a:buNone/>
             </a:pPr>
             <a:r>
-              <a:rPr lang="en-US" sz="900" b="1" dirty="0">
+              <a:rPr lang="en-US" sz="950" b="1" dirty="0">
                 <a:solidFill>
                   <a:srgbClr val="17324D"/>
                 </a:solidFill>
@@ -5223,6 +5054,73 @@
                 <a:ea typeface="Hanken Grotesk" pitchFamily="34" charset="-122"/>
                 <a:cs typeface="Hanken Grotesk" pitchFamily="34" charset="-120"/>
               </a:rPr>
+              <a:t>4. </a:t>
+            </a:r>
+            <a:pPr indent="0" marL="0">
+              <a:buNone/>
+            </a:pPr>
+            <a:r>
+              <a:rPr lang="en-US" sz="950" b="1" dirty="0">
+                <a:solidFill>
+                  <a:srgbClr val="17324D"/>
+                </a:solidFill>
+                <a:latin typeface="Hanken Grotesk" pitchFamily="34" charset="0"/>
+                <a:ea typeface="Hanken Grotesk" pitchFamily="34" charset="-122"/>
+                <a:cs typeface="Hanken Grotesk" pitchFamily="34" charset="-120"/>
+              </a:rPr>
+              <a:t>Calculate:  </a:t>
+            </a:r>
+            <a:pPr indent="0" marL="0">
+              <a:buNone/>
+            </a:pPr>
+            <a:r>
+              <a:rPr lang="en-US" sz="950" b="1" dirty="0">
+                <a:solidFill>
+                  <a:srgbClr val="24323F"/>
+                </a:solidFill>
+                <a:latin typeface="Courier New" pitchFamily="34" charset="0"/>
+                <a:ea typeface="Courier New" pitchFamily="34" charset="-122"/>
+                <a:cs typeface="Courier New" pitchFamily="34" charset="-120"/>
+              </a:rPr>
+              <a:t>64 + 3 = 67</a:t>
+            </a:r>
+            <a:endParaRPr lang="en-US" sz="950" dirty="0"/>
+          </a:p>
+        </p:txBody>
+      </p:sp>
+      <p:sp>
+        <p:nvSpPr>
+          <p:cNvPr id="27" name="Text 25"/>
+          <p:cNvSpPr/>
+          <p:nvPr/>
+        </p:nvSpPr>
+        <p:spPr>
+          <a:xfrm>
+            <a:off x="594360" y="3666744"/>
+            <a:ext cx="5120640" cy="228600"/>
+          </a:xfrm>
+          <a:prstGeom prst="rect">
+            <a:avLst/>
+          </a:prstGeom>
+          <a:noFill/>
+          <a:ln/>
+        </p:spPr>
+        <p:txBody>
+          <a:bodyPr wrap="square" rtlCol="0" anchor="ctr"/>
+          <a:lstStyle/>
+          <a:p>
+            <a:pPr indent="0" marL="0">
+              <a:buNone/>
+            </a:pPr>
+            <a:r>
+              <a:rPr lang="en-US" sz="900" b="1" dirty="0">
+                <a:solidFill>
+                  <a:srgbClr val="17324D"/>
+                </a:solidFill>
+                <a:latin typeface="Hanken Grotesk" pitchFamily="34" charset="0"/>
+                <a:ea typeface="Hanken Grotesk" pitchFamily="34" charset="-122"/>
+                <a:cs typeface="Hanken Grotesk" pitchFamily="34" charset="-120"/>
+              </a:rPr>
               <a:t>Which step has the error? Circle it above.</a:t>
             </a:r>
             <a:endParaRPr lang="en-US" sz="900" dirty="0"/>
@@ -5231,7 +5129,7 @@
       </p:sp>
       <p:sp>
         <p:nvSpPr>
-          <p:cNvPr id="27" name="Shape 25"/>
+          <p:cNvPr id="28" name="Shape 26"/>
           <p:cNvSpPr/>
           <p:nvPr/>
         </p:nvSpPr>
@@ -5265,7 +5163,7 @@
       </p:sp>
       <p:sp>
         <p:nvSpPr>
-          <p:cNvPr id="28" name="Text 26"/>
+          <p:cNvPr id="29" name="Text 27"/>
           <p:cNvSpPr/>
           <p:nvPr/>
         </p:nvSpPr>
@@ -5306,7 +5204,7 @@
       </p:sp>
       <p:sp>
         <p:nvSpPr>
-          <p:cNvPr id="29" name="Text 27"/>
+          <p:cNvPr id="30" name="Text 28"/>
           <p:cNvSpPr/>
           <p:nvPr/>
         </p:nvSpPr>
@@ -5401,7 +5299,7 @@
       </p:sp>
       <p:sp>
         <p:nvSpPr>
-          <p:cNvPr id="30" name="Shape 28"/>
+          <p:cNvPr id="31" name="Shape 29"/>
           <p:cNvSpPr/>
           <p:nvPr/>
         </p:nvSpPr>
@@ -5424,7 +5322,7 @@
       </p:sp>
       <p:sp>
         <p:nvSpPr>
-          <p:cNvPr id="31" name="Shape 29"/>
+          <p:cNvPr id="32" name="Shape 30"/>
           <p:cNvSpPr/>
           <p:nvPr/>
         </p:nvSpPr>
@@ -5447,7 +5345,7 @@
       </p:sp>
       <p:sp>
         <p:nvSpPr>
-          <p:cNvPr id="32" name="Shape 30"/>
+          <p:cNvPr id="33" name="Shape 31"/>
           <p:cNvSpPr/>
           <p:nvPr/>
         </p:nvSpPr>
@@ -5470,7 +5368,7 @@
       </p:sp>
       <p:sp>
         <p:nvSpPr>
-          <p:cNvPr id="33" name="Text 31"/>
+          <p:cNvPr id="34" name="Text 32"/>
           <p:cNvSpPr/>
           <p:nvPr/>
         </p:nvSpPr>
@@ -5509,7 +5407,7 @@
       </p:sp>
       <p:sp>
         <p:nvSpPr>
-          <p:cNvPr id="34" name="Shape 32"/>
+          <p:cNvPr id="35" name="Shape 33"/>
           <p:cNvSpPr/>
           <p:nvPr/>
         </p:nvSpPr>
@@ -5532,7 +5430,7 @@
       </p:sp>
       <p:sp>
         <p:nvSpPr>
-          <p:cNvPr id="35" name="Shape 33"/>
+          <p:cNvPr id="36" name="Shape 34"/>
           <p:cNvSpPr/>
           <p:nvPr/>
         </p:nvSpPr>
@@ -5555,7 +5453,7 @@
       </p:sp>
       <p:sp>
         <p:nvSpPr>
-          <p:cNvPr id="36" name="Shape 34"/>
+          <p:cNvPr id="37" name="Shape 35"/>
           <p:cNvSpPr/>
           <p:nvPr/>
         </p:nvSpPr>
@@ -5578,7 +5476,7 @@
       </p:sp>
       <p:sp>
         <p:nvSpPr>
-          <p:cNvPr id="37" name="Shape 35"/>
+          <p:cNvPr id="38" name="Shape 36"/>
           <p:cNvSpPr/>
           <p:nvPr/>
         </p:nvSpPr>
@@ -5766,7 +5664,7 @@
                 <a:ea typeface="Outfit" pitchFamily="34" charset="-122"/>
                 <a:cs typeface="Outfit" pitchFamily="34" charset="-120"/>
               </a:rPr>
-              <a:t>6.AT.7</a:t>
+              <a:t>6.AT.6c</a:t>
             </a:r>
             <a:endParaRPr lang="en-US" sz="900" dirty="0"/>
           </a:p>
@@ -5985,7 +5883,7 @@
                 <a:ea typeface="Hanken Grotesk" pitchFamily="34" charset="-122"/>
                 <a:cs typeface="Hanken Grotesk" pitchFamily="34" charset="-120"/>
               </a:rPr>
-              <a:t>Reveal Math Grade 6  ·  Unit 6  ·  Lesson 6-4</a:t>
+              <a:t>Reveal Math Grade 6  ·  Unit 6  ·  Lesson 6-2</a:t>
             </a:r>
             <a:endParaRPr lang="en-US" sz="750" dirty="0"/>
           </a:p>
@@ -6197,7 +6095,7 @@
                 <a:ea typeface="Hanken Grotesk" pitchFamily="34" charset="-122"/>
                 <a:cs typeface="Hanken Grotesk" pitchFamily="34" charset="-120"/>
               </a:rPr>
-              <a:t>I have 3 guitarists, 5 drummers, and 2 keyboard players.</a:t>
+              <a:t>Our cost expression is 150 + 12s, where s is the number of speakers.</a:t>
             </a:r>
             <a:endParaRPr lang="en-US" sz="1050" dirty="0"/>
           </a:p>
@@ -6295,7 +6193,7 @@
                 <a:ea typeface="Hanken Grotesk" pitchFamily="34" charset="-122"/>
                 <a:cs typeface="Hanken Grotesk" pitchFamily="34" charset="-120"/>
               </a:rPr>
-              <a:t>I can add them as 3 + 5 + 2, which gives 10.</a:t>
+              <a:t>I want the cost for s = 4 speakers.</a:t>
             </a:r>
             <a:endParaRPr lang="en-US" sz="1050" dirty="0"/>
           </a:p>
@@ -6393,7 +6291,7 @@
                 <a:ea typeface="Hanken Grotesk" pitchFamily="34" charset="-122"/>
                 <a:cs typeface="Hanken Grotesk" pitchFamily="34" charset="-120"/>
               </a:rPr>
-              <a:t>The Commutative Property says order does not matter: 5 + 3 + 2 also gives 10.</a:t>
+              <a:t>I replace s with 4: 150 + 12 × 4.</a:t>
             </a:r>
             <a:endParaRPr lang="en-US" sz="1050" dirty="0"/>
           </a:p>
@@ -6491,7 +6389,7 @@
                 <a:ea typeface="Hanken Grotesk" pitchFamily="34" charset="-122"/>
                 <a:cs typeface="Hanken Grotesk" pitchFamily="34" charset="-120"/>
               </a:rPr>
-              <a:t>The Associative Property says grouping does not matter: (3 + 5) + 2 = 3 + (5 + 2), both equal 10.</a:t>
+              <a:t>First I multiply: 12 × 4 = 48.</a:t>
             </a:r>
             <a:endParaRPr lang="en-US" sz="1050" dirty="0"/>
           </a:p>
@@ -6500,6 +6398,104 @@
       <p:sp>
         <p:nvSpPr>
           <p:cNvPr id="31" name="Shape 29"/>
+          <p:cNvSpPr/>
+          <p:nvPr/>
+        </p:nvSpPr>
+        <p:spPr>
+          <a:xfrm>
+            <a:off x="594360" y="3145536"/>
+            <a:ext cx="274320" cy="274320"/>
+          </a:xfrm>
+          <a:prstGeom prst="ellipse">
+            <a:avLst/>
+          </a:prstGeom>
+          <a:solidFill>
+            <a:srgbClr val="7A5C8E"/>
+          </a:solidFill>
+          <a:ln/>
+        </p:spPr>
+      </p:sp>
+      <p:sp>
+        <p:nvSpPr>
+          <p:cNvPr id="32" name="Text 30"/>
+          <p:cNvSpPr/>
+          <p:nvPr/>
+        </p:nvSpPr>
+        <p:spPr>
+          <a:xfrm>
+            <a:off x="594360" y="3145536"/>
+            <a:ext cx="274320" cy="274320"/>
+          </a:xfrm>
+          <a:prstGeom prst="rect">
+            <a:avLst/>
+          </a:prstGeom>
+          <a:noFill/>
+          <a:ln/>
+        </p:spPr>
+        <p:txBody>
+          <a:bodyPr wrap="square" rtlCol="0" anchor="ctr"/>
+          <a:lstStyle/>
+          <a:p>
+            <a:pPr algn="ctr" indent="0" marL="0">
+              <a:buNone/>
+            </a:pPr>
+            <a:r>
+              <a:rPr lang="en-US" sz="1100" b="1" dirty="0">
+                <a:solidFill>
+                  <a:srgbClr val="FFFFFF"/>
+                </a:solidFill>
+                <a:latin typeface="Outfit" pitchFamily="34" charset="0"/>
+                <a:ea typeface="Outfit" pitchFamily="34" charset="-122"/>
+                <a:cs typeface="Outfit" pitchFamily="34" charset="-120"/>
+              </a:rPr>
+              <a:t>5</a:t>
+            </a:r>
+            <a:endParaRPr lang="en-US" sz="1100" dirty="0"/>
+          </a:p>
+        </p:txBody>
+      </p:sp>
+      <p:sp>
+        <p:nvSpPr>
+          <p:cNvPr id="33" name="Text 31"/>
+          <p:cNvSpPr/>
+          <p:nvPr/>
+        </p:nvSpPr>
+        <p:spPr>
+          <a:xfrm>
+            <a:off x="978408" y="3090672"/>
+            <a:ext cx="3456432" cy="420624"/>
+          </a:xfrm>
+          <a:prstGeom prst="rect">
+            <a:avLst/>
+          </a:prstGeom>
+          <a:noFill/>
+          <a:ln/>
+        </p:spPr>
+        <p:txBody>
+          <a:bodyPr wrap="square" rtlCol="0" anchor="ctr"/>
+          <a:lstStyle/>
+          <a:p>
+            <a:pPr indent="0" marL="0">
+              <a:buNone/>
+            </a:pPr>
+            <a:r>
+              <a:rPr lang="en-US" sz="1050" dirty="0">
+                <a:solidFill>
+                  <a:srgbClr val="24323F"/>
+                </a:solidFill>
+                <a:latin typeface="Hanken Grotesk" pitchFamily="34" charset="0"/>
+                <a:ea typeface="Hanken Grotesk" pitchFamily="34" charset="-122"/>
+                <a:cs typeface="Hanken Grotesk" pitchFamily="34" charset="-120"/>
+              </a:rPr>
+              <a:t>Then I add: 150 + 48 = 198. So 4 speakers cost $198.</a:t>
+            </a:r>
+            <a:endParaRPr lang="en-US" sz="1050" dirty="0"/>
+          </a:p>
+        </p:txBody>
+      </p:sp>
+      <p:sp>
+        <p:nvSpPr>
+          <p:cNvPr id="34" name="Shape 32"/>
           <p:cNvSpPr/>
           <p:nvPr/>
         </p:nvSpPr>
@@ -6533,7 +6529,7 @@
       </p:sp>
       <p:sp>
         <p:nvSpPr>
-          <p:cNvPr id="32" name="Text 30"/>
+          <p:cNvPr id="35" name="Text 33"/>
           <p:cNvSpPr/>
           <p:nvPr/>
         </p:nvSpPr>
@@ -6574,7 +6570,7 @@
       </p:sp>
       <p:sp>
         <p:nvSpPr>
-          <p:cNvPr id="33" name="Text 31"/>
+          <p:cNvPr id="36" name="Text 34"/>
           <p:cNvSpPr/>
           <p:nvPr/>
         </p:nvSpPr>
@@ -6613,7 +6609,7 @@
       </p:sp>
       <p:sp>
         <p:nvSpPr>
-          <p:cNvPr id="34" name="Shape 32"/>
+          <p:cNvPr id="37" name="Shape 35"/>
           <p:cNvSpPr/>
           <p:nvPr/>
         </p:nvSpPr>
@@ -6636,7 +6632,7 @@
       </p:sp>
       <p:sp>
         <p:nvSpPr>
-          <p:cNvPr id="35" name="Shape 33"/>
+          <p:cNvPr id="38" name="Shape 36"/>
           <p:cNvSpPr/>
           <p:nvPr/>
         </p:nvSpPr>
@@ -6659,7 +6655,7 @@
       </p:sp>
       <p:sp>
         <p:nvSpPr>
-          <p:cNvPr id="36" name="Shape 34"/>
+          <p:cNvPr id="39" name="Shape 37"/>
           <p:cNvSpPr/>
           <p:nvPr/>
         </p:nvSpPr>
@@ -6682,7 +6678,7 @@
       </p:sp>
       <p:sp>
         <p:nvSpPr>
-          <p:cNvPr id="37" name="Shape 35"/>
+          <p:cNvPr id="40" name="Shape 38"/>
           <p:cNvSpPr/>
           <p:nvPr/>
         </p:nvSpPr>
@@ -6705,7 +6701,7 @@
       </p:sp>
       <p:sp>
         <p:nvSpPr>
-          <p:cNvPr id="38" name="Shape 36"/>
+          <p:cNvPr id="41" name="Shape 39"/>
           <p:cNvSpPr/>
           <p:nvPr/>
         </p:nvSpPr>
@@ -6728,7 +6724,7 @@
       </p:sp>
       <p:sp>
         <p:nvSpPr>
-          <p:cNvPr id="39" name="Shape 37"/>
+          <p:cNvPr id="42" name="Shape 40"/>
           <p:cNvSpPr/>
           <p:nvPr/>
         </p:nvSpPr>
@@ -6751,7 +6747,7 @@
       </p:sp>
       <p:sp>
         <p:nvSpPr>
-          <p:cNvPr id="40" name="Shape 38"/>
+          <p:cNvPr id="43" name="Shape 41"/>
           <p:cNvSpPr/>
           <p:nvPr/>
         </p:nvSpPr>
@@ -6774,7 +6770,7 @@
       </p:sp>
       <p:sp>
         <p:nvSpPr>
-          <p:cNvPr id="41" name="Shape 39"/>
+          <p:cNvPr id="44" name="Shape 42"/>
           <p:cNvSpPr/>
           <p:nvPr/>
         </p:nvSpPr>
@@ -6962,7 +6958,7 @@
                 <a:ea typeface="Outfit" pitchFamily="34" charset="-122"/>
                 <a:cs typeface="Outfit" pitchFamily="34" charset="-120"/>
               </a:rPr>
-              <a:t>6.AT.7</a:t>
+              <a:t>6.AT.6c</a:t>
             </a:r>
             <a:endParaRPr lang="en-US" sz="900" dirty="0"/>
           </a:p>
@@ -7181,7 +7177,7 @@
                 <a:ea typeface="Hanken Grotesk" pitchFamily="34" charset="-122"/>
                 <a:cs typeface="Hanken Grotesk" pitchFamily="34" charset="-120"/>
               </a:rPr>
-              <a:t>Reveal Math Grade 6  ·  Unit 6  ·  Lesson 6-4</a:t>
+              <a:t>Reveal Math Grade 6  ·  Unit 6  ·  Lesson 6-2</a:t>
             </a:r>
             <a:endParaRPr lang="en-US" sz="750" dirty="0"/>
           </a:p>
@@ -7407,7 +7403,7 @@
                 <a:ea typeface="Hanken Grotesk" pitchFamily="34" charset="-122"/>
                 <a:cs typeface="Hanken Grotesk" pitchFamily="34" charset="-120"/>
               </a:rPr>
-              <a:t>Sketch a model for today's problem. Label it using Commutative Property and Associative Property.</a:t>
+              <a:t>Sketch a model for today's problem. Label it using Variable and Expression.</a:t>
             </a:r>
             <a:endParaRPr lang="en-US" sz="1000" dirty="0"/>
           </a:p>
@@ -7555,7 +7551,7 @@
                 <a:ea typeface="Hanken Grotesk" pitchFamily="34" charset="-122"/>
                 <a:cs typeface="Hanken Grotesk" pitchFamily="34" charset="-120"/>
               </a:rPr>
-              <a:t>In 2–3 sentences, explain "Changing the order or the grouping of numbers being added or multiplied does not change the answer." in your own words.</a:t>
+              <a:t>In 2–3 sentences, explain "Replace the variable with its number, then follow the order of operations to find the total." in your own words.</a:t>
             </a:r>
             <a:endParaRPr lang="en-US" sz="1000" dirty="0"/>
           </a:p>
@@ -7851,7 +7847,7 @@
                 <a:ea typeface="Hanken Grotesk" pitchFamily="34" charset="-122"/>
                 <a:cs typeface="Hanken Grotesk" pitchFamily="34" charset="-120"/>
               </a:rPr>
-              <a:t>Write your own problem that uses Commutative Property, then solve it and make an answer key.</a:t>
+              <a:t>Write your own problem that uses Variable, then solve it and make an answer key.</a:t>
             </a:r>
             <a:endParaRPr lang="en-US" sz="1000" dirty="0"/>
           </a:p>
@@ -8024,7 +8020,7 @@
                 <a:ea typeface="Outfit" pitchFamily="34" charset="-122"/>
                 <a:cs typeface="Outfit" pitchFamily="34" charset="-120"/>
               </a:rPr>
-              <a:t>6.AT.7</a:t>
+              <a:t>6.AT.6c</a:t>
             </a:r>
             <a:endParaRPr lang="en-US" sz="900" dirty="0"/>
           </a:p>
@@ -8243,7 +8239,7 @@
                 <a:ea typeface="Hanken Grotesk" pitchFamily="34" charset="-122"/>
                 <a:cs typeface="Hanken Grotesk" pitchFamily="34" charset="-120"/>
               </a:rPr>
-              <a:t>Reveal Math Grade 6  ·  Unit 6  ·  Lesson 6-4</a:t>
+              <a:t>Reveal Math Grade 6  ·  Unit 6  ·  Lesson 6-2</a:t>
             </a:r>
             <a:endParaRPr lang="en-US" sz="750" dirty="0"/>
           </a:p>
@@ -8412,7 +8408,7 @@
                 <a:ea typeface="Hanken Grotesk" pitchFamily="34" charset="-122"/>
                 <a:cs typeface="Hanken Grotesk" pitchFamily="34" charset="-120"/>
               </a:rPr>
-              <a:t>Which property is shown? 5 + 13 = 13 + 5</a:t>
+              <a:t>Evaluate 3x + 7 when x = 4.</a:t>
             </a:r>
             <a:endParaRPr lang="en-US" sz="1050" dirty="0"/>
           </a:p>
@@ -8488,7 +8484,7 @@
                 <a:ea typeface="Hanken Grotesk" pitchFamily="34" charset="-122"/>
                 <a:cs typeface="Hanken Grotesk" pitchFamily="34" charset="-120"/>
               </a:rPr>
-              <a:t>Which property is shown? (6 × 3) × 2 = 6 × (3 × 2)</a:t>
+              <a:t>Evaluate 20 − 2n when n = 6.</a:t>
             </a:r>
             <a:endParaRPr lang="en-US" sz="1050" dirty="0"/>
           </a:p>
@@ -8564,7 +8560,7 @@
                 <a:ea typeface="Hanken Grotesk" pitchFamily="34" charset="-122"/>
                 <a:cs typeface="Hanken Grotesk" pitchFamily="34" charset="-120"/>
               </a:rPr>
-              <a:t>Which property is shown? 47 + 0 = 47</a:t>
+              <a:t>Which expression means '5 less than twice a number n'?</a:t>
             </a:r>
             <a:endParaRPr lang="en-US" sz="1050" dirty="0"/>
           </a:p>
@@ -8701,7 +8697,7 @@
                 <a:ea typeface="Hanken Grotesk" pitchFamily="34" charset="-122"/>
                 <a:cs typeface="Hanken Grotesk" pitchFamily="34" charset="-120"/>
               </a:rPr>
-              <a:t>To find 4 × 17 × 25 mentally, the engineer rearranges to 4 × 25 × 17 = 100 × 17. Which properties did she use, and why does rearranging help?</a:t>
+              <a:t>The rideshare fare is 2.50 + 1.75m for m miles. How much is an 8-mile ride, and what does each part of the expression represent?</a:t>
             </a:r>
             <a:endParaRPr lang="en-US" sz="1000" dirty="0"/>
           </a:p>
@@ -8989,7 +8985,7 @@
                 <a:ea typeface="Outfit" pitchFamily="34" charset="-122"/>
                 <a:cs typeface="Outfit" pitchFamily="34" charset="-120"/>
               </a:rPr>
-              <a:t>6.AT.7</a:t>
+              <a:t>6.AT.6c</a:t>
             </a:r>
             <a:endParaRPr lang="en-US" sz="900" dirty="0"/>
           </a:p>
@@ -9208,7 +9204,7 @@
                 <a:ea typeface="Hanken Grotesk" pitchFamily="34" charset="-122"/>
                 <a:cs typeface="Hanken Grotesk" pitchFamily="34" charset="-120"/>
               </a:rPr>
-              <a:t>Reveal Math Grade 6  ·  Unit 6  ·  Lesson 6-4</a:t>
+              <a:t>Reveal Math Grade 6  ·  Unit 6  ·  Lesson 6-2</a:t>
             </a:r>
             <a:endParaRPr lang="en-US" sz="750" dirty="0"/>
           </a:p>
@@ -9412,7 +9408,7 @@
                 <a:ea typeface="Hanken Grotesk" pitchFamily="34" charset="-122"/>
                 <a:cs typeface="Hanken Grotesk" pitchFamily="34" charset="-120"/>
               </a:rPr>
-              <a:t>Today's key idea is "Changing the order or the grouping of numbers being added or multiplied does not change the answer." — and it works because ___.</a:t>
+              <a:t>Today's key idea is "Replace the variable with its number, then follow the order of operations to find the total." — and it works because ___.</a:t>
             </a:r>
             <a:endParaRPr lang="en-US" sz="1050" dirty="0"/>
           </a:p>
@@ -9561,7 +9557,7 @@
                 <a:ea typeface="Hanken Grotesk" pitchFamily="34" charset="-122"/>
                 <a:cs typeface="Hanken Grotesk" pitchFamily="34" charset="-120"/>
               </a:rPr>
-              <a:t>Because Commutative Property means ___, but a tricky part is ___, so I have to ___.</a:t>
+              <a:t>Because Variable means ___, but a tricky part is ___, so I have to ___.</a:t>
             </a:r>
             <a:endParaRPr lang="en-US" sz="1050" dirty="0"/>
           </a:p>
@@ -9710,7 +9706,7 @@
                 <a:ea typeface="Hanken Grotesk" pitchFamily="34" charset="-122"/>
                 <a:cs typeface="Hanken Grotesk" pitchFamily="34" charset="-120"/>
               </a:rPr>
-              <a:t>A common mistake with Commutative Property is ___. It happens because ___, and the fix is ___.</a:t>
+              <a:t>A common mistake with Variable is ___. It happens because ___, and the fix is ___.</a:t>
             </a:r>
             <a:endParaRPr lang="en-US" sz="1050" dirty="0"/>
           </a:p>
@@ -9906,7 +9902,7 @@
                 <a:ea typeface="Outfit" pitchFamily="34" charset="-122"/>
                 <a:cs typeface="Outfit" pitchFamily="34" charset="-120"/>
               </a:rPr>
-              <a:t>6.AT.7</a:t>
+              <a:t>6.AT.6c</a:t>
             </a:r>
             <a:endParaRPr lang="en-US" sz="900" dirty="0"/>
           </a:p>
@@ -10125,7 +10121,7 @@
                 <a:ea typeface="Hanken Grotesk" pitchFamily="34" charset="-122"/>
                 <a:cs typeface="Hanken Grotesk" pitchFamily="34" charset="-120"/>
               </a:rPr>
-              <a:t>Reveal Math Grade 6  ·  Unit 6  ·  Lesson 6-4</a:t>
+              <a:t>Reveal Math Grade 6  ·  Unit 6  ·  Lesson 6-2</a:t>
             </a:r>
             <a:endParaRPr lang="en-US" sz="750" dirty="0"/>
           </a:p>
@@ -10583,7 +10579,7 @@
                 <a:ea typeface="Hanken Grotesk" pitchFamily="34" charset="-122"/>
                 <a:cs typeface="Hanken Grotesk" pitchFamily="34" charset="-120"/>
               </a:rPr>
-              <a:t>Which property is shown? (8 + 5) + 2 = 8 + (5 + 2)</a:t>
+              <a:t>Evaluate 5(n − 3) + 2 when n = 7.</a:t>
             </a:r>
             <a:endParaRPr lang="en-US" sz="1050" dirty="0"/>
           </a:p>
@@ -10622,7 +10618,7 @@
                 <a:ea typeface="Hanken Grotesk" pitchFamily="34" charset="-122"/>
                 <a:cs typeface="Hanken Grotesk" pitchFamily="34" charset="-120"/>
               </a:rPr>
-              <a:t>A.  Associative Property</a:t>
+              <a:t>A.  22</a:t>
             </a:r>
             <a:endParaRPr lang="en-US" sz="1000" dirty="0"/>
           </a:p>
@@ -10661,7 +10657,7 @@
                 <a:ea typeface="Hanken Grotesk" pitchFamily="34" charset="-122"/>
                 <a:cs typeface="Hanken Grotesk" pitchFamily="34" charset="-120"/>
               </a:rPr>
-              <a:t>B.  Commutative Property</a:t>
+              <a:t>B.  34</a:t>
             </a:r>
             <a:endParaRPr lang="en-US" sz="1000" dirty="0"/>
           </a:p>
@@ -10700,7 +10696,7 @@
                 <a:ea typeface="Hanken Grotesk" pitchFamily="34" charset="-122"/>
                 <a:cs typeface="Hanken Grotesk" pitchFamily="34" charset="-120"/>
               </a:rPr>
-              <a:t>C.  Identity Property</a:t>
+              <a:t>C.  20</a:t>
             </a:r>
             <a:endParaRPr lang="en-US" sz="1000" dirty="0"/>
           </a:p>
@@ -10739,7 +10735,7 @@
                 <a:ea typeface="Hanken Grotesk" pitchFamily="34" charset="-122"/>
                 <a:cs typeface="Hanken Grotesk" pitchFamily="34" charset="-120"/>
               </a:rPr>
-              <a:t>D.  Distributive Property</a:t>
+              <a:t>D.  18</a:t>
             </a:r>
             <a:endParaRPr lang="en-US" sz="1000" dirty="0"/>
           </a:p>
@@ -11034,7 +11030,7 @@
                 <a:ea typeface="Outfit" pitchFamily="34" charset="-122"/>
                 <a:cs typeface="Outfit" pitchFamily="34" charset="-120"/>
               </a:rPr>
-              <a:t>6.AT.7</a:t>
+              <a:t>6.AT.6c</a:t>
             </a:r>
             <a:endParaRPr lang="en-US" sz="900" dirty="0"/>
           </a:p>
@@ -11253,7 +11249,7 @@
                 <a:ea typeface="Hanken Grotesk" pitchFamily="34" charset="-122"/>
                 <a:cs typeface="Hanken Grotesk" pitchFamily="34" charset="-120"/>
               </a:rPr>
-              <a:t>Reveal Math Grade 6  ·  Unit 6  ·  Lesson 6-4</a:t>
+              <a:t>Reveal Math Grade 6  ·  Unit 6  ·  Lesson 6-2</a:t>
             </a:r>
             <a:endParaRPr lang="en-US" sz="750" dirty="0"/>
           </a:p>
@@ -11367,7 +11363,7 @@
                 <a:ea typeface="Hanken Grotesk" pitchFamily="34" charset="-122"/>
                 <a:cs typeface="Hanken Grotesk" pitchFamily="34" charset="-120"/>
               </a:rPr>
-              <a:t>I can use the commutative, associative, and identity properties to rewrite expressions.</a:t>
+              <a:t>I can evaluate algebraic expressions by substituting values for the variables.</a:t>
             </a:r>
             <a:endParaRPr lang="en-US" sz="1100" dirty="0"/>
           </a:p>
@@ -12467,7 +12463,7 @@
                 <a:ea typeface="Outfit" pitchFamily="34" charset="-122"/>
                 <a:cs typeface="Outfit" pitchFamily="34" charset="-120"/>
               </a:rPr>
-              <a:t>6.AT.7</a:t>
+              <a:t>6.AT.6c</a:t>
             </a:r>
             <a:endParaRPr lang="en-US" sz="900" dirty="0"/>
           </a:p>
@@ -12686,7 +12682,7 @@
                 <a:ea typeface="Hanken Grotesk" pitchFamily="34" charset="-122"/>
                 <a:cs typeface="Hanken Grotesk" pitchFamily="34" charset="-120"/>
               </a:rPr>
-              <a:t>Reveal Math Grade 6  ·  Unit 6  ·  Lesson 6-4</a:t>
+              <a:t>Reveal Math Grade 6  ·  Unit 6  ·  Lesson 6-2</a:t>
             </a:r>
             <a:endParaRPr lang="en-US" sz="750" dirty="0"/>
           </a:p>
@@ -12936,7 +12932,7 @@
                 <a:ea typeface="Hanken Grotesk" pitchFamily="34" charset="-122"/>
                 <a:cs typeface="Hanken Grotesk" pitchFamily="34" charset="-120"/>
               </a:rPr>
-              <a:t>I can use the commutative, associative, and identity properties to rewrite expressions.</a:t>
+              <a:t>I can evaluate algebraic expressions by substituting values for the variables.</a:t>
             </a:r>
             <a:endParaRPr lang="en-US" sz="1800" dirty="0"/>
           </a:p>
@@ -13108,7 +13104,7 @@
                 <a:ea typeface="Hanken Grotesk" pitchFamily="34" charset="-122"/>
                 <a:cs typeface="Hanken Grotesk" pitchFamily="34" charset="-120"/>
               </a:rPr>
-              <a:t>I can explain my reasoning using the words commutative property, associative property, and identity property.</a:t>
+              <a:t>I can explain my steps using the words variable, expression, evaluate, and substitute.</a:t>
             </a:r>
             <a:endParaRPr lang="en-US" sz="1700" dirty="0"/>
           </a:p>
@@ -13281,7 +13277,7 @@
                 <a:ea typeface="Outfit" pitchFamily="34" charset="-122"/>
                 <a:cs typeface="Outfit" pitchFamily="34" charset="-120"/>
               </a:rPr>
-              <a:t>6.AT.7</a:t>
+              <a:t>6.AT.6c</a:t>
             </a:r>
             <a:endParaRPr lang="en-US" sz="900" dirty="0"/>
           </a:p>
@@ -13500,7 +13496,7 @@
                 <a:ea typeface="Hanken Grotesk" pitchFamily="34" charset="-122"/>
                 <a:cs typeface="Hanken Grotesk" pitchFamily="34" charset="-120"/>
               </a:rPr>
-              <a:t>Reveal Math Grade 6  ·  Unit 6  ·  Lesson 6-4</a:t>
+              <a:t>Reveal Math Grade 6  ·  Unit 6  ·  Lesson 6-2</a:t>
             </a:r>
             <a:endParaRPr lang="en-US" sz="750" dirty="0"/>
           </a:p>
@@ -13697,7 +13693,7 @@
                 <a:ea typeface="Hanken Grotesk" pitchFamily="34" charset="-122"/>
                 <a:cs typeface="Hanken Grotesk" pitchFamily="34" charset="-120"/>
               </a:rPr>
-              <a:t>The band has 3 guitarists, 5 drummers, and 2 keyboard players. Whether you seat guitarists or drummers first, you still have 10 musicians. Which property explains this, and why does it work?</a:t>
+              <a:t>The concert cost is 150 + 12s, where s is the number of speakers. How do you find the cost for 5 speakers, and why does this one expression work for any number of speakers?</a:t>
             </a:r>
             <a:endParaRPr lang="en-US" sz="1400" dirty="0"/>
           </a:p>
@@ -14027,7 +14023,7 @@
                 <a:ea typeface="Hanken Grotesk" pitchFamily="34" charset="-122"/>
                 <a:cs typeface="Hanken Grotesk" pitchFamily="34" charset="-120"/>
               </a:rPr>
-              <a:t>Commutative Property</a:t>
+              <a:t>Variable</a:t>
             </a:r>
             <a:endParaRPr lang="en-US" sz="900" dirty="0"/>
           </a:p>
@@ -14074,7 +14070,7 @@
                 <a:ea typeface="Hanken Grotesk" pitchFamily="34" charset="-122"/>
                 <a:cs typeface="Hanken Grotesk" pitchFamily="34" charset="-120"/>
               </a:rPr>
-              <a:t>Associative Property</a:t>
+              <a:t>Expression</a:t>
             </a:r>
             <a:endParaRPr lang="en-US" sz="900" dirty="0"/>
           </a:p>
@@ -14121,7 +14117,7 @@
                 <a:ea typeface="Hanken Grotesk" pitchFamily="34" charset="-122"/>
                 <a:cs typeface="Hanken Grotesk" pitchFamily="34" charset="-120"/>
               </a:rPr>
-              <a:t>Identity Property</a:t>
+              <a:t>Evaluate</a:t>
             </a:r>
             <a:endParaRPr lang="en-US" sz="900" dirty="0"/>
           </a:p>
@@ -14168,7 +14164,7 @@
                 <a:ea typeface="Hanken Grotesk" pitchFamily="34" charset="-122"/>
                 <a:cs typeface="Hanken Grotesk" pitchFamily="34" charset="-120"/>
               </a:rPr>
-              <a:t>Property</a:t>
+              <a:t>Substitute</a:t>
             </a:r>
             <a:endParaRPr lang="en-US" sz="900" dirty="0"/>
           </a:p>
@@ -14341,7 +14337,7 @@
                 <a:ea typeface="Outfit" pitchFamily="34" charset="-122"/>
                 <a:cs typeface="Outfit" pitchFamily="34" charset="-120"/>
               </a:rPr>
-              <a:t>6.AT.7</a:t>
+              <a:t>6.AT.6c</a:t>
             </a:r>
             <a:endParaRPr lang="en-US" sz="900" dirty="0"/>
           </a:p>
@@ -14560,7 +14556,7 @@
                 <a:ea typeface="Hanken Grotesk" pitchFamily="34" charset="-122"/>
                 <a:cs typeface="Hanken Grotesk" pitchFamily="34" charset="-120"/>
               </a:rPr>
-              <a:t>Reveal Math Grade 6  ·  Unit 6  ·  Lesson 6-4</a:t>
+              <a:t>Reveal Math Grade 6  ·  Unit 6  ·  Lesson 6-2</a:t>
             </a:r>
             <a:endParaRPr lang="en-US" sz="750" dirty="0"/>
           </a:p>
@@ -14757,7 +14753,7 @@
                 <a:ea typeface="Hanken Grotesk" pitchFamily="34" charset="-122"/>
                 <a:cs typeface="Hanken Grotesk" pitchFamily="34" charset="-120"/>
               </a:rPr>
-              <a:t>How can you tell the commutative property from the associative property? Use 6 + 9 = 9 + 6 and (3 + 5) + 2 = 3 + (5 + 2) to explain.</a:t>
+              <a:t>When you evaluate an expression like 4x² + 3, what order do you follow, and why must you square before you multiply?</a:t>
             </a:r>
             <a:endParaRPr lang="en-US" sz="1400" dirty="0"/>
           </a:p>
@@ -15087,7 +15083,7 @@
                 <a:ea typeface="Hanken Grotesk" pitchFamily="34" charset="-122"/>
                 <a:cs typeface="Hanken Grotesk" pitchFamily="34" charset="-120"/>
               </a:rPr>
-              <a:t>Commutative Property</a:t>
+              <a:t>Evaluate</a:t>
             </a:r>
             <a:endParaRPr lang="en-US" sz="900" dirty="0"/>
           </a:p>
@@ -15134,7 +15130,7 @@
                 <a:ea typeface="Hanken Grotesk" pitchFamily="34" charset="-122"/>
                 <a:cs typeface="Hanken Grotesk" pitchFamily="34" charset="-120"/>
               </a:rPr>
-              <a:t>Associative Property</a:t>
+              <a:t>Substitute</a:t>
             </a:r>
             <a:endParaRPr lang="en-US" sz="900" dirty="0"/>
           </a:p>
@@ -15181,7 +15177,7 @@
                 <a:ea typeface="Hanken Grotesk" pitchFamily="34" charset="-122"/>
                 <a:cs typeface="Hanken Grotesk" pitchFamily="34" charset="-120"/>
               </a:rPr>
-              <a:t>Identity Property</a:t>
+              <a:t>Expression</a:t>
             </a:r>
             <a:endParaRPr lang="en-US" sz="900" dirty="0"/>
           </a:p>
@@ -15228,7 +15224,7 @@
                 <a:ea typeface="Hanken Grotesk" pitchFamily="34" charset="-122"/>
                 <a:cs typeface="Hanken Grotesk" pitchFamily="34" charset="-120"/>
               </a:rPr>
-              <a:t>Property</a:t>
+              <a:t>Variable</a:t>
             </a:r>
             <a:endParaRPr lang="en-US" sz="900" dirty="0"/>
           </a:p>
@@ -15401,7 +15397,7 @@
                 <a:ea typeface="Outfit" pitchFamily="34" charset="-122"/>
                 <a:cs typeface="Outfit" pitchFamily="34" charset="-120"/>
               </a:rPr>
-              <a:t>6.AT.7</a:t>
+              <a:t>6.AT.6c</a:t>
             </a:r>
             <a:endParaRPr lang="en-US" sz="900" dirty="0"/>
           </a:p>
@@ -15620,7 +15616,7 @@
                 <a:ea typeface="Hanken Grotesk" pitchFamily="34" charset="-122"/>
                 <a:cs typeface="Hanken Grotesk" pitchFamily="34" charset="-120"/>
               </a:rPr>
-              <a:t>Reveal Math Grade 6  ·  Unit 6  ·  Lesson 6-4</a:t>
+              <a:t>Reveal Math Grade 6  ·  Unit 6  ·  Lesson 6-2</a:t>
             </a:r>
             <a:endParaRPr lang="en-US" sz="750" dirty="0"/>
           </a:p>
@@ -15817,7 +15813,7 @@
                 <a:ea typeface="Hanken Grotesk" pitchFamily="34" charset="-122"/>
                 <a:cs typeface="Hanken Grotesk" pitchFamily="34" charset="-120"/>
               </a:rPr>
-              <a:t>To find 4 × 17 × 25 mentally, the engineer rearranges to 4 × 25 × 17 = 100 × 17. Which properties did she use, and why does rearranging help?</a:t>
+              <a:t>The rideshare fare is 2.50 + 1.75m for m miles. How much is an 8-mile ride, and what does each part of the expression represent?</a:t>
             </a:r>
             <a:endParaRPr lang="en-US" sz="1400" dirty="0"/>
           </a:p>
@@ -16147,7 +16143,7 @@
                 <a:ea typeface="Hanken Grotesk" pitchFamily="34" charset="-122"/>
                 <a:cs typeface="Hanken Grotesk" pitchFamily="34" charset="-120"/>
               </a:rPr>
-              <a:t>Commutative Property</a:t>
+              <a:t>Substitute</a:t>
             </a:r>
             <a:endParaRPr lang="en-US" sz="900" dirty="0"/>
           </a:p>
@@ -16194,7 +16190,7 @@
                 <a:ea typeface="Hanken Grotesk" pitchFamily="34" charset="-122"/>
                 <a:cs typeface="Hanken Grotesk" pitchFamily="34" charset="-120"/>
               </a:rPr>
-              <a:t>Associative Property</a:t>
+              <a:t>Variable</a:t>
             </a:r>
             <a:endParaRPr lang="en-US" sz="900" dirty="0"/>
           </a:p>
@@ -16241,7 +16237,7 @@
                 <a:ea typeface="Hanken Grotesk" pitchFamily="34" charset="-122"/>
                 <a:cs typeface="Hanken Grotesk" pitchFamily="34" charset="-120"/>
               </a:rPr>
-              <a:t>Property</a:t>
+              <a:t>Evaluate</a:t>
             </a:r>
             <a:endParaRPr lang="en-US" sz="900" dirty="0"/>
           </a:p>
@@ -16288,7 +16284,7 @@
                 <a:ea typeface="Hanken Grotesk" pitchFamily="34" charset="-122"/>
                 <a:cs typeface="Hanken Grotesk" pitchFamily="34" charset="-120"/>
               </a:rPr>
-              <a:t>Identity Property</a:t>
+              <a:t>Expression</a:t>
             </a:r>
             <a:endParaRPr lang="en-US" sz="900" dirty="0"/>
           </a:p>
@@ -16461,7 +16457,7 @@
                 <a:ea typeface="Outfit" pitchFamily="34" charset="-122"/>
                 <a:cs typeface="Outfit" pitchFamily="34" charset="-120"/>
               </a:rPr>
-              <a:t>6.AT.7</a:t>
+              <a:t>6.AT.6c</a:t>
             </a:r>
             <a:endParaRPr lang="en-US" sz="900" dirty="0"/>
           </a:p>
@@ -16680,7 +16676,7 @@
                 <a:ea typeface="Hanken Grotesk" pitchFamily="34" charset="-122"/>
                 <a:cs typeface="Hanken Grotesk" pitchFamily="34" charset="-120"/>
               </a:rPr>
-              <a:t>Reveal Math Grade 6  ·  Unit 6  ·  Lesson 6-4</a:t>
+              <a:t>Reveal Math Grade 6  ·  Unit 6  ·  Lesson 6-2</a:t>
             </a:r>
             <a:endParaRPr lang="en-US" sz="750" dirty="0"/>
           </a:p>
@@ -16877,7 +16873,7 @@
                 <a:ea typeface="Hanken Grotesk" pitchFamily="34" charset="-122"/>
                 <a:cs typeface="Hanken Grotesk" pitchFamily="34" charset="-120"/>
               </a:rPr>
-              <a:t>During practice on Properties of Operations, what strategy did you use when a problem felt tricky?</a:t>
+              <a:t>During practice on Evaluate Expressions, what strategy did you use when a problem felt tricky?</a:t>
             </a:r>
             <a:endParaRPr lang="en-US" sz="1400" dirty="0"/>
           </a:p>
@@ -17207,7 +17203,7 @@
                 <a:ea typeface="Hanken Grotesk" pitchFamily="34" charset="-122"/>
                 <a:cs typeface="Hanken Grotesk" pitchFamily="34" charset="-120"/>
               </a:rPr>
-              <a:t>Commutative Property</a:t>
+              <a:t>Variable</a:t>
             </a:r>
             <a:endParaRPr lang="en-US" sz="900" dirty="0"/>
           </a:p>
@@ -17254,7 +17250,7 @@
                 <a:ea typeface="Hanken Grotesk" pitchFamily="34" charset="-122"/>
                 <a:cs typeface="Hanken Grotesk" pitchFamily="34" charset="-120"/>
               </a:rPr>
-              <a:t>Associative Property</a:t>
+              <a:t>Expression</a:t>
             </a:r>
             <a:endParaRPr lang="en-US" sz="900" dirty="0"/>
           </a:p>
@@ -17301,7 +17297,7 @@
                 <a:ea typeface="Hanken Grotesk" pitchFamily="34" charset="-122"/>
                 <a:cs typeface="Hanken Grotesk" pitchFamily="34" charset="-120"/>
               </a:rPr>
-              <a:t>Identity Property</a:t>
+              <a:t>Evaluate</a:t>
             </a:r>
             <a:endParaRPr lang="en-US" sz="900" dirty="0"/>
           </a:p>
@@ -17348,7 +17344,7 @@
                 <a:ea typeface="Hanken Grotesk" pitchFamily="34" charset="-122"/>
                 <a:cs typeface="Hanken Grotesk" pitchFamily="34" charset="-120"/>
               </a:rPr>
-              <a:t>Property</a:t>
+              <a:t>Substitute</a:t>
             </a:r>
             <a:endParaRPr lang="en-US" sz="900" dirty="0"/>
           </a:p>
@@ -17521,7 +17517,7 @@
                 <a:ea typeface="Outfit" pitchFamily="34" charset="-122"/>
                 <a:cs typeface="Outfit" pitchFamily="34" charset="-120"/>
               </a:rPr>
-              <a:t>6.AT.7</a:t>
+              <a:t>6.AT.6c</a:t>
             </a:r>
             <a:endParaRPr lang="en-US" sz="900" dirty="0"/>
           </a:p>
@@ -17740,7 +17736,7 @@
                 <a:ea typeface="Hanken Grotesk" pitchFamily="34" charset="-122"/>
                 <a:cs typeface="Hanken Grotesk" pitchFamily="34" charset="-120"/>
               </a:rPr>
-              <a:t>Reveal Math Grade 6  ·  Unit 6  ·  Lesson 6-4</a:t>
+              <a:t>Reveal Math Grade 6  ·  Unit 6  ·  Lesson 6-2</a:t>
             </a:r>
             <a:endParaRPr lang="en-US" sz="750" dirty="0"/>
           </a:p>
@@ -17895,7 +17891,7 @@
                 <a:ea typeface="Outfit" pitchFamily="34" charset="-122"/>
                 <a:cs typeface="Outfit" pitchFamily="34" charset="-120"/>
               </a:rPr>
-              <a:t>Band Formation</a:t>
+              <a:t>Mix the Track</a:t>
             </a:r>
             <a:endParaRPr lang="en-US" sz="1100" dirty="0"/>
           </a:p>
@@ -17934,7 +17930,7 @@
                 <a:ea typeface="Hanken Grotesk" pitchFamily="34" charset="-122"/>
                 <a:cs typeface="Hanken Grotesk" pitchFamily="34" charset="-120"/>
               </a:rPr>
-              <a:t>You're a band director arranging musicians on stage. You have 3 guitarists, 5 drummers, and 2 keyboard players. Whether you seat the guitarists first or the drummers first, you still have 3 + 5 + 2 = 10 musicians. The order you arrange them doesn't change the total!</a:t>
+              <a:t>You're a music producer setting up a concert. The total cost of the event is given by the expression 150 + 12s, where s is the number of speakers rented. The venue charges $150 as a base fee, plus $12 for each speaker. How much will it cost for different numbers of speakers?</a:t>
             </a:r>
             <a:endParaRPr lang="en-US" sz="1150" dirty="0"/>
           </a:p>
@@ -18159,7 +18155,7 @@
                 <a:ea typeface="Hanken Grotesk" pitchFamily="34" charset="-122"/>
                 <a:cs typeface="Hanken Grotesk" pitchFamily="34" charset="-120"/>
               </a:rPr>
-              <a:t>•  Does the order you add the musicians change the total?</a:t>
+              <a:t>•  What does the 150 represent in the expression?</a:t>
             </a:r>
             <a:endParaRPr lang="en-US" sz="1000" dirty="0"/>
           </a:p>
@@ -18179,7 +18175,7 @@
                 <a:ea typeface="Hanken Grotesk" pitchFamily="34" charset="-122"/>
                 <a:cs typeface="Hanken Grotesk" pitchFamily="34" charset="-120"/>
               </a:rPr>
-              <a:t>•  What if you group different sections together first — does the total change?</a:t>
+              <a:t>•  What does the 12s represent?</a:t>
             </a:r>
             <a:endParaRPr lang="en-US" sz="1000" dirty="0"/>
           </a:p>
@@ -18199,7 +18195,7 @@
                 <a:ea typeface="Hanken Grotesk" pitchFamily="34" charset="-122"/>
                 <a:cs typeface="Hanken Grotesk" pitchFamily="34" charset="-120"/>
               </a:rPr>
-              <a:t>•  What happens when you add 0 musicians to a group?</a:t>
+              <a:t>•  What happens to the total cost as s gets bigger?</a:t>
             </a:r>
             <a:endParaRPr lang="en-US" sz="1000" dirty="0"/>
           </a:p>
@@ -18316,7 +18312,7 @@
                 <a:ea typeface="Hanken Grotesk" pitchFamily="34" charset="-122"/>
                 <a:cs typeface="Hanken Grotesk" pitchFamily="34" charset="-120"/>
               </a:rPr>
-              <a:t>•  Do these same rules work for subtraction or division?</a:t>
+              <a:t>•  What if speakers cost $15 each instead?</a:t>
             </a:r>
             <a:endParaRPr lang="en-US" sz="1000" dirty="0"/>
           </a:p>
@@ -18336,7 +18332,7 @@
                 <a:ea typeface="Hanken Grotesk" pitchFamily="34" charset="-122"/>
                 <a:cs typeface="Hanken Grotesk" pitchFamily="34" charset="-120"/>
               </a:rPr>
-              <a:t>•  Can rearranging terms help make mental math easier?</a:t>
+              <a:t>•  How many speakers can we afford with a $300 budget?</a:t>
             </a:r>
             <a:endParaRPr lang="en-US" sz="1000" dirty="0"/>
           </a:p>
@@ -18509,7 +18505,7 @@
                 <a:ea typeface="Outfit" pitchFamily="34" charset="-122"/>
                 <a:cs typeface="Outfit" pitchFamily="34" charset="-120"/>
               </a:rPr>
-              <a:t>6.AT.7</a:t>
+              <a:t>6.AT.6c</a:t>
             </a:r>
             <a:endParaRPr lang="en-US" sz="900" dirty="0"/>
           </a:p>
@@ -18728,7 +18724,7 @@
                 <a:ea typeface="Hanken Grotesk" pitchFamily="34" charset="-122"/>
                 <a:cs typeface="Hanken Grotesk" pitchFamily="34" charset="-120"/>
               </a:rPr>
-              <a:t>Reveal Math Grade 6  ·  Unit 6  ·  Lesson 6-4</a:t>
+              <a:t>Reveal Math Grade 6  ·  Unit 6  ·  Lesson 6-2</a:t>
             </a:r>
             <a:endParaRPr lang="en-US" sz="750" dirty="0"/>
           </a:p>
@@ -19024,7 +19020,7 @@
                           <a:ea typeface="Hanken Grotesk" pitchFamily="34" charset="-122"/>
                           <a:cs typeface="Hanken Grotesk" pitchFamily="34" charset="-120"/>
                         </a:rPr>
-                        <a:t>Commutative Property</a:t>
+                        <a:t>Variable</a:t>
                       </a:r>
                       <a:pPr indent="0" marL="0">
                         <a:buNone/>
@@ -19048,7 +19044,7 @@
                           <a:ea typeface="Hanken Grotesk" pitchFamily="34" charset="-122"/>
                           <a:cs typeface="Hanken Grotesk" pitchFamily="34" charset="-120"/>
                         </a:rPr>
-                        <a:t>Propiedad conmutativa</a:t>
+                        <a:t>Variable</a:t>
                       </a:r>
                       <a:endParaRPr lang="en-US" sz="950" dirty="0">
                         <a:latin typeface="Hanken Grotesk" charset="0"/>
@@ -19116,7 +19112,7 @@
                           <a:ea typeface="Hanken Grotesk" pitchFamily="34" charset="-122"/>
                           <a:cs typeface="Hanken Grotesk" pitchFamily="34" charset="-120"/>
                         </a:rPr>
-                        <a:t>You can change the order and get the same answer.</a:t>
+                        <a:t>A letter that stands for an unknown number.</a:t>
                       </a:r>
                       <a:pPr indent="0" marL="0">
                         <a:buNone/>
@@ -19140,7 +19136,7 @@
                           <a:ea typeface="Hanken Grotesk" pitchFamily="34" charset="-122"/>
                           <a:cs typeface="Hanken Grotesk" pitchFamily="34" charset="-120"/>
                         </a:rPr>
-                        <a:t>Puedes cambiar el orden y obtener la misma respuesta.</a:t>
+                        <a:t>Una letra que representa un número desconocido.</a:t>
                       </a:r>
                       <a:endParaRPr lang="en-US" sz="900" dirty="0">
                         <a:latin typeface="Hanken Grotesk" charset="0"/>
@@ -19208,7 +19204,7 @@
                           <a:ea typeface="Hanken Grotesk" pitchFamily="34" charset="-122"/>
                           <a:cs typeface="Hanken Grotesk" pitchFamily="34" charset="-120"/>
                         </a:rPr>
-                        <a:t>3 + 7 = 7 + 3 = 10 both ways; 4 × 5 = 5 × 4 = 20 both ways — order does not matter</a:t>
+                        <a:t>In 3x + 5, x can be any number — if x = 2, the expression equals 11; if x = 10, it equals 35</a:t>
                       </a:r>
                       <a:endParaRPr lang="en-US" sz="900" dirty="0">
                         <a:latin typeface="Hanken Grotesk" charset="0"/>
@@ -19278,7 +19274,7 @@
                           <a:ea typeface="Hanken Grotesk" pitchFamily="34" charset="-122"/>
                           <a:cs typeface="Hanken Grotesk" pitchFamily="34" charset="-120"/>
                         </a:rPr>
-                        <a:t>Associative Property</a:t>
+                        <a:t>Expression</a:t>
                       </a:r>
                       <a:pPr indent="0" marL="0">
                         <a:buNone/>
@@ -19302,7 +19298,7 @@
                           <a:ea typeface="Hanken Grotesk" pitchFamily="34" charset="-122"/>
                           <a:cs typeface="Hanken Grotesk" pitchFamily="34" charset="-120"/>
                         </a:rPr>
-                        <a:t>Propiedad asociativa</a:t>
+                        <a:t>Expresión</a:t>
                       </a:r>
                       <a:endParaRPr lang="en-US" sz="950" dirty="0">
                         <a:latin typeface="Hanken Grotesk" charset="0"/>
@@ -19370,7 +19366,7 @@
                           <a:ea typeface="Hanken Grotesk" pitchFamily="34" charset="-122"/>
                           <a:cs typeface="Hanken Grotesk" pitchFamily="34" charset="-120"/>
                         </a:rPr>
-                        <a:t>You can change the grouping and get the same answer.</a:t>
+                        <a:t>A math phrase with numbers and letters, but no equal sign.</a:t>
                       </a:r>
                       <a:pPr indent="0" marL="0">
                         <a:buNone/>
@@ -19394,7 +19390,7 @@
                           <a:ea typeface="Hanken Grotesk" pitchFamily="34" charset="-122"/>
                           <a:cs typeface="Hanken Grotesk" pitchFamily="34" charset="-120"/>
                         </a:rPr>
-                        <a:t>Puedes cambiar la agrupación y obtener la misma respuesta.</a:t>
+                        <a:t>Una frase matemática con números y letras, pero sin signo igual.</a:t>
                       </a:r>
                       <a:endParaRPr lang="en-US" sz="900" dirty="0">
                         <a:latin typeface="Hanken Grotesk" charset="0"/>
@@ -19462,7 +19458,7 @@
                           <a:ea typeface="Hanken Grotesk" pitchFamily="34" charset="-122"/>
                           <a:cs typeface="Hanken Grotesk" pitchFamily="34" charset="-120"/>
                         </a:rPr>
-                        <a:t>(2 + 3) + 4 = 5 + 4 = 9 and 2 + (3 + 4) = 2 + 7 = 9 — same answer, different grouping</a:t>
+                        <a:t>2n + 7 is an expression: the 2n means '2 times some number' and the + 7 means 'then add 7'</a:t>
                       </a:r>
                       <a:endParaRPr lang="en-US" sz="900" dirty="0">
                         <a:latin typeface="Hanken Grotesk" charset="0"/>
@@ -19532,7 +19528,7 @@
                           <a:ea typeface="Hanken Grotesk" pitchFamily="34" charset="-122"/>
                           <a:cs typeface="Hanken Grotesk" pitchFamily="34" charset="-120"/>
                         </a:rPr>
-                        <a:t>Identity Property</a:t>
+                        <a:t>Evaluate</a:t>
                       </a:r>
                       <a:pPr indent="0" marL="0">
                         <a:buNone/>
@@ -19556,7 +19552,7 @@
                           <a:ea typeface="Hanken Grotesk" pitchFamily="34" charset="-122"/>
                           <a:cs typeface="Hanken Grotesk" pitchFamily="34" charset="-120"/>
                         </a:rPr>
-                        <a:t>Propiedad de identidad</a:t>
+                        <a:t>Evaluar</a:t>
                       </a:r>
                       <a:endParaRPr lang="en-US" sz="950" dirty="0">
                         <a:latin typeface="Hanken Grotesk" charset="0"/>
@@ -19624,7 +19620,7 @@
                           <a:ea typeface="Hanken Grotesk" pitchFamily="34" charset="-122"/>
                           <a:cs typeface="Hanken Grotesk" pitchFamily="34" charset="-120"/>
                         </a:rPr>
-                        <a:t>Adding 0 or multiplying by 1 keeps the same value.</a:t>
+                        <a:t>To find the value by putting numbers in for the letters.</a:t>
                       </a:r>
                       <a:pPr indent="0" marL="0">
                         <a:buNone/>
@@ -19648,7 +19644,7 @@
                           <a:ea typeface="Hanken Grotesk" pitchFamily="34" charset="-122"/>
                           <a:cs typeface="Hanken Grotesk" pitchFamily="34" charset="-120"/>
                         </a:rPr>
-                        <a:t>Sumar 0 o multiplicar por 1 mantiene el mismo valor.</a:t>
+                        <a:t>Encontrar el valor poniendo números en lugar de las letras.</a:t>
                       </a:r>
                       <a:endParaRPr lang="en-US" sz="900" dirty="0">
                         <a:latin typeface="Hanken Grotesk" charset="0"/>
@@ -19716,7 +19712,7 @@
                           <a:ea typeface="Hanken Grotesk" pitchFamily="34" charset="-122"/>
                           <a:cs typeface="Hanken Grotesk" pitchFamily="34" charset="-120"/>
                         </a:rPr>
-                        <a:t>9 + 0 = 9 (zero is the identity for addition); 6 × 1 = 6 (one is the identity for multiplication)</a:t>
+                        <a:t>Evaluate 2n + 7 when n = 4: replace n with 4 → 2(4) + 7 = 8 + 7 = 15</a:t>
                       </a:r>
                       <a:endParaRPr lang="en-US" sz="900" dirty="0">
                         <a:latin typeface="Hanken Grotesk" charset="0"/>
@@ -19786,7 +19782,7 @@
                           <a:ea typeface="Hanken Grotesk" pitchFamily="34" charset="-122"/>
                           <a:cs typeface="Hanken Grotesk" pitchFamily="34" charset="-120"/>
                         </a:rPr>
-                        <a:t>Property</a:t>
+                        <a:t>Substitute</a:t>
                       </a:r>
                       <a:pPr indent="0" marL="0">
                         <a:buNone/>
@@ -19810,7 +19806,7 @@
                           <a:ea typeface="Hanken Grotesk" pitchFamily="34" charset="-122"/>
                           <a:cs typeface="Hanken Grotesk" pitchFamily="34" charset="-120"/>
                         </a:rPr>
-                        <a:t>Propiedad</a:t>
+                        <a:t>Sustituir</a:t>
                       </a:r>
                       <a:endParaRPr lang="en-US" sz="950" dirty="0">
                         <a:latin typeface="Hanken Grotesk" charset="0"/>
@@ -19878,7 +19874,7 @@
                           <a:ea typeface="Hanken Grotesk" pitchFamily="34" charset="-122"/>
                           <a:cs typeface="Hanken Grotesk" pitchFamily="34" charset="-120"/>
                         </a:rPr>
-                        <a:t>A rule that is always true in math.</a:t>
+                        <a:t>To put a number in place of a letter.</a:t>
                       </a:r>
                       <a:pPr indent="0" marL="0">
                         <a:buNone/>
@@ -19902,7 +19898,7 @@
                           <a:ea typeface="Hanken Grotesk" pitchFamily="34" charset="-122"/>
                           <a:cs typeface="Hanken Grotesk" pitchFamily="34" charset="-120"/>
                         </a:rPr>
-                        <a:t>Una regla que siempre es verdadera en matemáticas.</a:t>
+                        <a:t>Poner un número en lugar de una letra.</a:t>
                       </a:r>
                       <a:endParaRPr lang="en-US" sz="900" dirty="0">
                         <a:latin typeface="Hanken Grotesk" charset="0"/>
@@ -19970,7 +19966,7 @@
                           <a:ea typeface="Hanken Grotesk" pitchFamily="34" charset="-122"/>
                           <a:cs typeface="Hanken Grotesk" pitchFamily="34" charset="-120"/>
                         </a:rPr>
-                        <a:t>Commutative works for + and ×, but NOT for − or ÷ (since 5 − 3 = 2 but 3 − 5 = −2)</a:t>
+                        <a:t>Substitute 3 for x in 5x: replace x with 3 → 5(3) = 15</a:t>
                       </a:r>
                       <a:endParaRPr lang="en-US" sz="900" dirty="0">
                         <a:latin typeface="Hanken Grotesk" charset="0"/>
@@ -20040,7 +20036,7 @@
                           <a:ea typeface="Hanken Grotesk" pitchFamily="34" charset="-122"/>
                           <a:cs typeface="Hanken Grotesk" pitchFamily="34" charset="-120"/>
                         </a:rPr>
-                        <a:t>Distributive Property</a:t>
+                        <a:t>Coefficient</a:t>
                       </a:r>
                       <a:pPr indent="0" marL="0">
                         <a:buNone/>
@@ -20064,7 +20060,7 @@
                           <a:ea typeface="Hanken Grotesk" pitchFamily="34" charset="-122"/>
                           <a:cs typeface="Hanken Grotesk" pitchFamily="34" charset="-120"/>
                         </a:rPr>
-                        <a:t>Propiedad distributiva</a:t>
+                        <a:t>Coeficiente</a:t>
                       </a:r>
                       <a:endParaRPr lang="en-US" sz="950" dirty="0">
                         <a:latin typeface="Hanken Grotesk" charset="0"/>
@@ -20132,7 +20128,7 @@
                           <a:ea typeface="Hanken Grotesk" pitchFamily="34" charset="-122"/>
                           <a:cs typeface="Hanken Grotesk" pitchFamily="34" charset="-120"/>
                         </a:rPr>
-                        <a:t>You can multiply a number by each part inside the parentheses, then add.</a:t>
+                        <a:t>The number in front of a letter, like the 3 in 3x.</a:t>
                       </a:r>
                       <a:pPr indent="0" marL="0">
                         <a:buNone/>
@@ -20156,7 +20152,7 @@
                           <a:ea typeface="Hanken Grotesk" pitchFamily="34" charset="-122"/>
                           <a:cs typeface="Hanken Grotesk" pitchFamily="34" charset="-120"/>
                         </a:rPr>
-                        <a:t>Puedes multiplicar un número por cada parte dentro del paréntesis y luego sumar.</a:t>
+                        <a:t>El número frente a una letra, como el 3 en 3x.</a:t>
                       </a:r>
                       <a:endParaRPr lang="en-US" sz="900" dirty="0">
                         <a:latin typeface="Hanken Grotesk" charset="0"/>
@@ -20224,7 +20220,7 @@
                           <a:ea typeface="Hanken Grotesk" pitchFamily="34" charset="-122"/>
                           <a:cs typeface="Hanken Grotesk" pitchFamily="34" charset="-120"/>
                         </a:rPr>
-                        <a:t>5(7 + 2) = 5 × 7 + 5 × 2 = 35 + 10 = 45; and 5 × 9 = 45 — same answer either way</a:t>
+                        <a:t>In 7m, the coefficient 7 tells you to multiply m by 7 — if m = 3, then 7m = 21</a:t>
                       </a:r>
                       <a:endParaRPr lang="en-US" sz="900" dirty="0">
                         <a:latin typeface="Hanken Grotesk" charset="0"/>
@@ -20313,7 +20309,7 @@
                 <a:ea typeface="Outfit" pitchFamily="34" charset="-122"/>
                 <a:cs typeface="Outfit" pitchFamily="34" charset="-120"/>
               </a:rPr>
-              <a:t>Commutative Property — example vs. non-example:</a:t>
+              <a:t>Expression — example vs. non-example:</a:t>
             </a:r>
             <a:endParaRPr lang="en-US" sz="950" dirty="0"/>
           </a:p>
@@ -20400,7 +20396,7 @@
                 <a:ea typeface="Hanken Grotesk" pitchFamily="34" charset="-122"/>
                 <a:cs typeface="Hanken Grotesk" pitchFamily="34" charset="-120"/>
               </a:rPr>
-              <a:t>4 + 7 = 7 + 4  </a:t>
+              <a:t>3x + 5  </a:t>
             </a:r>
             <a:pPr indent="0" marL="0">
               <a:buNone/>
@@ -20414,7 +20410,7 @@
                 <a:ea typeface="Hanken Grotesk" pitchFamily="34" charset="-122"/>
                 <a:cs typeface="Hanken Grotesk" pitchFamily="34" charset="-120"/>
               </a:rPr>
-              <a:t>Changing the order keeps the same sum.</a:t>
+              <a:t>It has terms and operations but no equal sign.</a:t>
             </a:r>
             <a:endParaRPr lang="en-US" sz="900" dirty="0"/>
           </a:p>
@@ -20501,7 +20497,7 @@
                 <a:ea typeface="Hanken Grotesk" pitchFamily="34" charset="-122"/>
                 <a:cs typeface="Hanken Grotesk" pitchFamily="34" charset="-120"/>
               </a:rPr>
-              <a:t>(4 + 7) + 2 = 4 + (7 + 2)  </a:t>
+              <a:t>3x + 5 = 11  </a:t>
             </a:r>
             <a:pPr indent="0" marL="0">
               <a:buNone/>
@@ -20515,7 +20511,7 @@
                 <a:ea typeface="Hanken Grotesk" pitchFamily="34" charset="-122"/>
                 <a:cs typeface="Hanken Grotesk" pitchFamily="34" charset="-120"/>
               </a:rPr>
-              <a:t>That shows the associative property, which regroups.</a:t>
+              <a:t>That is an equation because it has an equal sign.</a:t>
             </a:r>
             <a:endParaRPr lang="en-US" sz="900" dirty="0"/>
           </a:p>
@@ -20688,7 +20684,7 @@
                 <a:ea typeface="Outfit" pitchFamily="34" charset="-122"/>
                 <a:cs typeface="Outfit" pitchFamily="34" charset="-120"/>
               </a:rPr>
-              <a:t>6.AT.7</a:t>
+              <a:t>6.AT.6c</a:t>
             </a:r>
             <a:endParaRPr lang="en-US" sz="900" dirty="0"/>
           </a:p>
@@ -20907,7 +20903,7 @@
                 <a:ea typeface="Hanken Grotesk" pitchFamily="34" charset="-122"/>
                 <a:cs typeface="Hanken Grotesk" pitchFamily="34" charset="-120"/>
               </a:rPr>
-              <a:t>Reveal Math Grade 6  ·  Unit 6  ·  Lesson 6-4</a:t>
+              <a:t>Reveal Math Grade 6  ·  Unit 6  ·  Lesson 6-2</a:t>
             </a:r>
             <a:endParaRPr lang="en-US" sz="750" dirty="0"/>
           </a:p>
@@ -21062,7 +21058,7 @@
                 <a:ea typeface="Outfit" pitchFamily="34" charset="-122"/>
                 <a:cs typeface="Outfit" pitchFamily="34" charset="-120"/>
               </a:rPr>
-              <a:t>What are the properties of operations?</a:t>
+              <a:t>How do we find the value of an expression?</a:t>
             </a:r>
             <a:endParaRPr lang="en-US" sz="1200" dirty="0"/>
           </a:p>
@@ -21160,7 +21156,7 @@
                 <a:ea typeface="Hanken Grotesk" pitchFamily="34" charset="-122"/>
                 <a:cs typeface="Hanken Grotesk" pitchFamily="34" charset="-120"/>
               </a:rPr>
-              <a:t>Look at 6 + 9 and 9 + 6. Do they give the same total?</a:t>
+              <a:t>Let's try a simpler one. Find 150 + 12s when s = 1.</a:t>
             </a:r>
             <a:endParaRPr lang="en-US" sz="1050" dirty="0"/>
           </a:p>
@@ -21258,7 +21254,7 @@
                 <a:ea typeface="Hanken Grotesk" pitchFamily="34" charset="-122"/>
                 <a:cs typeface="Hanken Grotesk" pitchFamily="34" charset="-120"/>
               </a:rPr>
-              <a:t>6 + 9 = 15 and 9 + 6 = 15. Yes, the same.</a:t>
+              <a:t>What goes in place of s? Yes, 1. So we have 150 + 12 × 1.</a:t>
             </a:r>
             <a:endParaRPr lang="en-US" sz="1050" dirty="0"/>
           </a:p>
@@ -21356,7 +21352,7 @@
                 <a:ea typeface="Hanken Grotesk" pitchFamily="34" charset="-122"/>
                 <a:cs typeface="Hanken Grotesk" pitchFamily="34" charset="-120"/>
               </a:rPr>
-              <a:t>Only the order changed, so this shows the Commutative Property.</a:t>
+              <a:t>12 × 1 = 12, then 150 + 12 = 162. So 1 speaker costs $162.</a:t>
             </a:r>
             <a:endParaRPr lang="en-US" sz="1050" dirty="0"/>
           </a:p>
@@ -21532,7 +21528,7 @@
                 <a:ea typeface="Hanken Grotesk" pitchFamily="34" charset="-122"/>
                 <a:cs typeface="Hanken Grotesk" pitchFamily="34" charset="-120"/>
               </a:rPr>
-              <a:t>The band has 3 guitarists, 5 drummers, and 2 keyboard players. Whether you seat guitarists or drummers first, you still have 10 musicians. Which property explains this, and why does it work?</a:t>
+              <a:t>The concert cost is 150 + 12s, where s is the number of speakers. How do you find the cost for 5 speakers, and why does this one expression work for any number of speakers?</a:t>
             </a:r>
             <a:endParaRPr lang="en-US" sz="1000" dirty="0"/>
           </a:p>
@@ -21644,7 +21640,7 @@
                 <a:ea typeface="Hanken Grotesk" pitchFamily="34" charset="-122"/>
                 <a:cs typeface="Hanken Grotesk" pitchFamily="34" charset="-120"/>
               </a:rPr>
-              <a:t>Changing the order or the grouping of numbers being added or multiplied does not change the answer.</a:t>
+              <a:t>Replace the variable with its number, then follow the order of operations to find the total.</a:t>
             </a:r>
             <a:endParaRPr lang="en-US" sz="950" dirty="0"/>
           </a:p>
